--- a/13_Moby_Crea/13_Moby_Crea_Corrige.pptx
+++ b/13_Moby_Crea/13_Moby_Crea_Corrige.pptx
@@ -18,9 +18,12 @@
     <p:sldId id="280" r:id="rId12"/>
     <p:sldId id="282" r:id="rId13"/>
     <p:sldId id="275" r:id="rId14"/>
-    <p:sldId id="272" r:id="rId15"/>
-    <p:sldId id="271" r:id="rId16"/>
-    <p:sldId id="274" r:id="rId17"/>
+    <p:sldId id="284" r:id="rId15"/>
+    <p:sldId id="283" r:id="rId16"/>
+    <p:sldId id="285" r:id="rId17"/>
+    <p:sldId id="272" r:id="rId18"/>
+    <p:sldId id="271" r:id="rId19"/>
+    <p:sldId id="274" r:id="rId20"/>
   </p:sldIdLst>
   <p:sldSz cx="12192000" cy="6858000"/>
   <p:notesSz cx="6858000" cy="9144000"/>
@@ -381,7 +384,7 @@
           <a:p>
             <a:fld id="{D7F135F6-2A09-4FDD-9ECA-096E230CA0FA}" type="datetimeFigureOut">
               <a:rPr lang="fr-FR" smtClean="0"/>
-              <a:t>02/02/2026</a:t>
+              <a:t>28/04/2026</a:t>
             </a:fld>
             <a:endParaRPr lang="fr-FR"/>
           </a:p>
@@ -586,7 +589,7 @@
           <a:p>
             <a:fld id="{D7F135F6-2A09-4FDD-9ECA-096E230CA0FA}" type="datetimeFigureOut">
               <a:rPr lang="fr-FR" smtClean="0"/>
-              <a:t>02/02/2026</a:t>
+              <a:t>28/04/2026</a:t>
             </a:fld>
             <a:endParaRPr lang="fr-FR"/>
           </a:p>
@@ -842,7 +845,7 @@
           <a:p>
             <a:fld id="{D7F135F6-2A09-4FDD-9ECA-096E230CA0FA}" type="datetimeFigureOut">
               <a:rPr lang="fr-FR" smtClean="0"/>
-              <a:t>02/02/2026</a:t>
+              <a:t>28/04/2026</a:t>
             </a:fld>
             <a:endParaRPr lang="fr-FR"/>
           </a:p>
@@ -1048,7 +1051,7 @@
           <a:p>
             <a:fld id="{D7F135F6-2A09-4FDD-9ECA-096E230CA0FA}" type="datetimeFigureOut">
               <a:rPr lang="fr-FR" smtClean="0"/>
-              <a:t>02/02/2026</a:t>
+              <a:t>28/04/2026</a:t>
             </a:fld>
             <a:endParaRPr lang="fr-FR"/>
           </a:p>
@@ -1424,7 +1427,7 @@
           <a:p>
             <a:fld id="{D7F135F6-2A09-4FDD-9ECA-096E230CA0FA}" type="datetimeFigureOut">
               <a:rPr lang="fr-FR" smtClean="0"/>
-              <a:t>02/02/2026</a:t>
+              <a:t>28/04/2026</a:t>
             </a:fld>
             <a:endParaRPr lang="fr-FR"/>
           </a:p>
@@ -1699,7 +1702,7 @@
           <a:p>
             <a:fld id="{D7F135F6-2A09-4FDD-9ECA-096E230CA0FA}" type="datetimeFigureOut">
               <a:rPr lang="fr-FR" smtClean="0"/>
-              <a:t>02/02/2026</a:t>
+              <a:t>28/04/2026</a:t>
             </a:fld>
             <a:endParaRPr lang="fr-FR"/>
           </a:p>
@@ -2078,7 +2081,7 @@
           <a:p>
             <a:fld id="{D7F135F6-2A09-4FDD-9ECA-096E230CA0FA}" type="datetimeFigureOut">
               <a:rPr lang="fr-FR" smtClean="0"/>
-              <a:t>02/02/2026</a:t>
+              <a:t>28/04/2026</a:t>
             </a:fld>
             <a:endParaRPr lang="fr-FR"/>
           </a:p>
@@ -2196,7 +2199,7 @@
           <a:p>
             <a:fld id="{D7F135F6-2A09-4FDD-9ECA-096E230CA0FA}" type="datetimeFigureOut">
               <a:rPr lang="fr-FR" smtClean="0"/>
-              <a:t>02/02/2026</a:t>
+              <a:t>28/04/2026</a:t>
             </a:fld>
             <a:endParaRPr lang="fr-FR"/>
           </a:p>
@@ -2370,7 +2373,7 @@
           <a:p>
             <a:fld id="{D7F135F6-2A09-4FDD-9ECA-096E230CA0FA}" type="datetimeFigureOut">
               <a:rPr lang="fr-FR" smtClean="0"/>
-              <a:t>02/02/2026</a:t>
+              <a:t>28/04/2026</a:t>
             </a:fld>
             <a:endParaRPr lang="fr-FR"/>
           </a:p>
@@ -2727,7 +2730,7 @@
           <a:p>
             <a:fld id="{D7F135F6-2A09-4FDD-9ECA-096E230CA0FA}" type="datetimeFigureOut">
               <a:rPr lang="fr-FR" smtClean="0"/>
-              <a:t>02/02/2026</a:t>
+              <a:t>28/04/2026</a:t>
             </a:fld>
             <a:endParaRPr lang="fr-FR"/>
           </a:p>
@@ -3112,7 +3115,7 @@
           <a:p>
             <a:fld id="{D7F135F6-2A09-4FDD-9ECA-096E230CA0FA}" type="datetimeFigureOut">
               <a:rPr lang="fr-FR" smtClean="0"/>
-              <a:t>02/02/2026</a:t>
+              <a:t>28/04/2026</a:t>
             </a:fld>
             <a:endParaRPr lang="fr-FR"/>
           </a:p>
@@ -3416,7 +3419,7 @@
           <a:p>
             <a:fld id="{D7F135F6-2A09-4FDD-9ECA-096E230CA0FA}" type="datetimeFigureOut">
               <a:rPr lang="fr-FR" smtClean="0"/>
-              <a:t>02/02/2026</a:t>
+              <a:t>28/04/2026</a:t>
             </a:fld>
             <a:endParaRPr lang="fr-FR" dirty="0"/>
           </a:p>
@@ -11346,8 +11349,8 @@
           </a:fontRef>
         </p:style>
       </p:cxnSp>
-      <mc:AlternateContent xmlns:mc="http://schemas.openxmlformats.org/markup-compatibility/2006">
-        <mc:Choice xmlns:a14="http://schemas.microsoft.com/office/drawing/2010/main" Requires="a14">
+      <mc:AlternateContent xmlns:mc="http://schemas.openxmlformats.org/markup-compatibility/2006" xmlns:a14="http://schemas.microsoft.com/office/drawing/2010/main">
+        <mc:Choice Requires="a14">
           <p:sp>
             <p:nvSpPr>
               <p:cNvPr id="76" name="ZoneTexte 75">
@@ -11416,7 +11419,7 @@
             </p:txBody>
           </p:sp>
         </mc:Choice>
-        <mc:Fallback>
+        <mc:Fallback xmlns="">
           <p:sp>
             <p:nvSpPr>
               <p:cNvPr id="76" name="ZoneTexte 75">
@@ -15100,8 +15103,8 @@
           </a:fontRef>
         </p:style>
       </p:cxnSp>
-      <mc:AlternateContent xmlns:mc="http://schemas.openxmlformats.org/markup-compatibility/2006">
-        <mc:Choice xmlns:a14="http://schemas.microsoft.com/office/drawing/2010/main" Requires="a14">
+      <mc:AlternateContent xmlns:mc="http://schemas.openxmlformats.org/markup-compatibility/2006" xmlns:a14="http://schemas.microsoft.com/office/drawing/2010/main">
+        <mc:Choice Requires="a14">
           <p:sp>
             <p:nvSpPr>
               <p:cNvPr id="74" name="ZoneTexte 73">
@@ -15169,7 +15172,7 @@
             </p:txBody>
           </p:sp>
         </mc:Choice>
-        <mc:Fallback>
+        <mc:Fallback xmlns="">
           <p:sp>
             <p:nvSpPr>
               <p:cNvPr id="74" name="ZoneTexte 73">
@@ -15404,8 +15407,8 @@
           </a:fontRef>
         </p:style>
       </p:cxnSp>
-      <mc:AlternateContent xmlns:mc="http://schemas.openxmlformats.org/markup-compatibility/2006">
-        <mc:Choice xmlns:a14="http://schemas.microsoft.com/office/drawing/2010/main" Requires="a14">
+      <mc:AlternateContent xmlns:mc="http://schemas.openxmlformats.org/markup-compatibility/2006" xmlns:a14="http://schemas.microsoft.com/office/drawing/2010/main">
+        <mc:Choice Requires="a14">
           <p:sp>
             <p:nvSpPr>
               <p:cNvPr id="76" name="ZoneTexte 75">
@@ -15474,7 +15477,7 @@
             </p:txBody>
           </p:sp>
         </mc:Choice>
-        <mc:Fallback>
+        <mc:Fallback xmlns="">
           <p:sp>
             <p:nvSpPr>
               <p:cNvPr id="76" name="ZoneTexte 75">
@@ -15566,8 +15569,8 @@
           </a:fontRef>
         </p:style>
       </p:cxnSp>
-      <mc:AlternateContent xmlns:mc="http://schemas.openxmlformats.org/markup-compatibility/2006">
-        <mc:Choice xmlns:a14="http://schemas.microsoft.com/office/drawing/2010/main" Requires="a14">
+      <mc:AlternateContent xmlns:mc="http://schemas.openxmlformats.org/markup-compatibility/2006" xmlns:a14="http://schemas.microsoft.com/office/drawing/2010/main">
+        <mc:Choice Requires="a14">
           <p:sp>
             <p:nvSpPr>
               <p:cNvPr id="79" name="ZoneTexte 78">
@@ -15660,7 +15663,7 @@
             </p:txBody>
           </p:sp>
         </mc:Choice>
-        <mc:Fallback>
+        <mc:Fallback xmlns="">
           <p:sp>
             <p:nvSpPr>
               <p:cNvPr id="79" name="ZoneTexte 78">
@@ -15752,8 +15755,8 @@
           </a:fontRef>
         </p:style>
       </p:cxnSp>
-      <mc:AlternateContent xmlns:mc="http://schemas.openxmlformats.org/markup-compatibility/2006">
-        <mc:Choice xmlns:a14="http://schemas.microsoft.com/office/drawing/2010/main" Requires="a14">
+      <mc:AlternateContent xmlns:mc="http://schemas.openxmlformats.org/markup-compatibility/2006" xmlns:a14="http://schemas.microsoft.com/office/drawing/2010/main">
+        <mc:Choice Requires="a14">
           <p:sp>
             <p:nvSpPr>
               <p:cNvPr id="84" name="ZoneTexte 83">
@@ -15846,7 +15849,7 @@
             </p:txBody>
           </p:sp>
         </mc:Choice>
-        <mc:Fallback>
+        <mc:Fallback xmlns="">
           <p:sp>
             <p:nvSpPr>
               <p:cNvPr id="84" name="ZoneTexte 83">
@@ -16048,6 +16051,4699 @@
   <p:cSld>
     <p:spTree>
       <p:nvGrpSpPr>
+        <p:cNvPr id="1" name="">
+          <a:extLst>
+            <a:ext uri="{FF2B5EF4-FFF2-40B4-BE49-F238E27FC236}">
+              <a16:creationId xmlns:a16="http://schemas.microsoft.com/office/drawing/2014/main" id="{9B81DA19-16B4-E8EC-1A65-92E59703C92C}"/>
+            </a:ext>
+          </a:extLst>
+        </p:cNvPr>
+        <p:cNvGrpSpPr/>
+        <p:nvPr/>
+      </p:nvGrpSpPr>
+      <p:grpSpPr>
+        <a:xfrm>
+          <a:off x="0" y="0"/>
+          <a:ext cx="0" cy="0"/>
+          <a:chOff x="0" y="0"/>
+          <a:chExt cx="0" cy="0"/>
+        </a:xfrm>
+      </p:grpSpPr>
+      <p:sp>
+        <p:nvSpPr>
+          <p:cNvPr id="4" name="Titre 3">
+            <a:extLst>
+              <a:ext uri="{FF2B5EF4-FFF2-40B4-BE49-F238E27FC236}">
+                <a16:creationId xmlns:a16="http://schemas.microsoft.com/office/drawing/2014/main" id="{679833EA-95DC-1E20-DFD8-D848024B5505}"/>
+              </a:ext>
+            </a:extLst>
+          </p:cNvPr>
+          <p:cNvSpPr>
+            <a:spLocks noGrp="1"/>
+          </p:cNvSpPr>
+          <p:nvPr>
+            <p:ph type="title"/>
+          </p:nvPr>
+        </p:nvSpPr>
+        <p:spPr/>
+        <p:txBody>
+          <a:bodyPr>
+            <a:normAutofit/>
+          </a:bodyPr>
+          <a:lstStyle/>
+          <a:p>
+            <a:r>
+              <a:rPr lang="fr-FR" dirty="0"/>
+              <a:t>09</a:t>
+            </a:r>
+            <a:br>
+              <a:rPr lang="fr-FR" dirty="0"/>
+            </a:br>
+            <a:r>
+              <a:rPr lang="fr-FR" dirty="0"/>
+              <a:t>Dimensionnement d’un actionneur en statique</a:t>
+            </a:r>
+          </a:p>
+        </p:txBody>
+      </p:sp>
+      <p:sp>
+        <p:nvSpPr>
+          <p:cNvPr id="5" name="Espace réservé du texte 4">
+            <a:extLst>
+              <a:ext uri="{FF2B5EF4-FFF2-40B4-BE49-F238E27FC236}">
+                <a16:creationId xmlns:a16="http://schemas.microsoft.com/office/drawing/2014/main" id="{C2DD5C33-1BC5-F679-C7A2-633448D7917D}"/>
+              </a:ext>
+            </a:extLst>
+          </p:cNvPr>
+          <p:cNvSpPr>
+            <a:spLocks noGrp="1"/>
+          </p:cNvSpPr>
+          <p:nvPr>
+            <p:ph type="body" idx="1"/>
+          </p:nvPr>
+        </p:nvSpPr>
+        <p:spPr/>
+        <p:txBody>
+          <a:bodyPr/>
+          <a:lstStyle/>
+          <a:p>
+            <a:endParaRPr lang="fr-FR"/>
+          </a:p>
+        </p:txBody>
+      </p:sp>
+    </p:spTree>
+    <p:extLst>
+      <p:ext uri="{BB962C8B-B14F-4D97-AF65-F5344CB8AC3E}">
+        <p14:creationId xmlns:p14="http://schemas.microsoft.com/office/powerpoint/2010/main" val="2322839342"/>
+      </p:ext>
+    </p:extLst>
+  </p:cSld>
+  <p:clrMapOvr>
+    <a:masterClrMapping/>
+  </p:clrMapOvr>
+</p:sld>
+</file>
+
+<file path=ppt/slides/slide15.xml><?xml version="1.0" encoding="utf-8"?>
+<p:sld xmlns:a="http://schemas.openxmlformats.org/drawingml/2006/main" xmlns:r="http://schemas.openxmlformats.org/officeDocument/2006/relationships" xmlns:p="http://schemas.openxmlformats.org/presentationml/2006/main">
+  <p:cSld>
+    <p:spTree>
+      <p:nvGrpSpPr>
+        <p:cNvPr id="1" name="">
+          <a:extLst>
+            <a:ext uri="{FF2B5EF4-FFF2-40B4-BE49-F238E27FC236}">
+              <a16:creationId xmlns:a16="http://schemas.microsoft.com/office/drawing/2014/main" id="{8311B5D6-3F32-640D-690D-6F3A9A8A19FF}"/>
+            </a:ext>
+          </a:extLst>
+        </p:cNvPr>
+        <p:cNvGrpSpPr/>
+        <p:nvPr/>
+      </p:nvGrpSpPr>
+      <p:grpSpPr>
+        <a:xfrm>
+          <a:off x="0" y="0"/>
+          <a:ext cx="0" cy="0"/>
+          <a:chOff x="0" y="0"/>
+          <a:chExt cx="0" cy="0"/>
+        </a:xfrm>
+      </p:grpSpPr>
+      <p:sp>
+        <p:nvSpPr>
+          <p:cNvPr id="2" name="Titre 1">
+            <a:extLst>
+              <a:ext uri="{FF2B5EF4-FFF2-40B4-BE49-F238E27FC236}">
+                <a16:creationId xmlns:a16="http://schemas.microsoft.com/office/drawing/2014/main" id="{F08C89F3-99C3-B458-B4C1-75E642447524}"/>
+              </a:ext>
+            </a:extLst>
+          </p:cNvPr>
+          <p:cNvSpPr>
+            <a:spLocks noGrp="1"/>
+          </p:cNvSpPr>
+          <p:nvPr>
+            <p:ph type="title"/>
+          </p:nvPr>
+        </p:nvSpPr>
+        <p:spPr/>
+        <p:txBody>
+          <a:bodyPr/>
+          <a:lstStyle/>
+          <a:p>
+            <a:endParaRPr lang="fr-FR"/>
+          </a:p>
+        </p:txBody>
+      </p:sp>
+      <p:grpSp>
+        <p:nvGrpSpPr>
+          <p:cNvPr id="4" name="Groupe 3">
+            <a:extLst>
+              <a:ext uri="{FF2B5EF4-FFF2-40B4-BE49-F238E27FC236}">
+                <a16:creationId xmlns:a16="http://schemas.microsoft.com/office/drawing/2014/main" id="{7FB8C9F3-7F11-82D1-F508-EC17504265AC}"/>
+              </a:ext>
+            </a:extLst>
+          </p:cNvPr>
+          <p:cNvGrpSpPr/>
+          <p:nvPr/>
+        </p:nvGrpSpPr>
+        <p:grpSpPr>
+          <a:xfrm>
+            <a:off x="7143107" y="1255706"/>
+            <a:ext cx="4361134" cy="2557397"/>
+            <a:chOff x="4171306" y="1231643"/>
+            <a:chExt cx="4361134" cy="2557397"/>
+          </a:xfrm>
+        </p:grpSpPr>
+        <p:grpSp>
+          <p:nvGrpSpPr>
+            <p:cNvPr id="7" name="Groupe 6">
+              <a:extLst>
+                <a:ext uri="{FF2B5EF4-FFF2-40B4-BE49-F238E27FC236}">
+                  <a16:creationId xmlns:a16="http://schemas.microsoft.com/office/drawing/2014/main" id="{8F003F2D-67A4-FE9A-8A0F-49C4F716F45D}"/>
+                </a:ext>
+              </a:extLst>
+            </p:cNvPr>
+            <p:cNvGrpSpPr/>
+            <p:nvPr/>
+          </p:nvGrpSpPr>
+          <p:grpSpPr>
+            <a:xfrm>
+              <a:off x="4171306" y="3356992"/>
+              <a:ext cx="719636" cy="432048"/>
+              <a:chOff x="204247" y="1842525"/>
+              <a:chExt cx="719636" cy="432048"/>
+            </a:xfrm>
+          </p:grpSpPr>
+          <p:sp>
+            <p:nvSpPr>
+              <p:cNvPr id="58" name="Ellipse 57">
+                <a:extLst>
+                  <a:ext uri="{FF2B5EF4-FFF2-40B4-BE49-F238E27FC236}">
+                    <a16:creationId xmlns:a16="http://schemas.microsoft.com/office/drawing/2014/main" id="{DC27CC5B-2934-A5FB-7A51-B0392ACA2267}"/>
+                  </a:ext>
+                </a:extLst>
+              </p:cNvPr>
+              <p:cNvSpPr/>
+              <p:nvPr/>
+            </p:nvSpPr>
+            <p:spPr>
+              <a:xfrm>
+                <a:off x="204247" y="1991610"/>
+                <a:ext cx="180000" cy="180000"/>
+              </a:xfrm>
+              <a:prstGeom prst="ellipse">
+                <a:avLst/>
+              </a:prstGeom>
+              <a:noFill/>
+              <a:ln w="19050">
+                <a:solidFill>
+                  <a:schemeClr val="tx1"/>
+                </a:solidFill>
+              </a:ln>
+            </p:spPr>
+            <p:style>
+              <a:lnRef idx="2">
+                <a:schemeClr val="accent1">
+                  <a:shade val="50000"/>
+                </a:schemeClr>
+              </a:lnRef>
+              <a:fillRef idx="1">
+                <a:schemeClr val="accent1"/>
+              </a:fillRef>
+              <a:effectRef idx="0">
+                <a:schemeClr val="accent1"/>
+              </a:effectRef>
+              <a:fontRef idx="minor">
+                <a:schemeClr val="lt1"/>
+              </a:fontRef>
+            </p:style>
+            <p:txBody>
+              <a:bodyPr rtlCol="0" anchor="ctr"/>
+              <a:lstStyle/>
+              <a:p>
+                <a:pPr algn="ctr"/>
+                <a:r>
+                  <a:rPr lang="fr-FR" sz="1050" b="1" dirty="0">
+                    <a:solidFill>
+                      <a:schemeClr val="tx1"/>
+                    </a:solidFill>
+                  </a:rPr>
+                  <a:t>0</a:t>
+                </a:r>
+                <a:endParaRPr lang="fr-FR" sz="1400" b="1" dirty="0">
+                  <a:solidFill>
+                    <a:schemeClr val="tx1"/>
+                  </a:solidFill>
+                </a:endParaRPr>
+              </a:p>
+            </p:txBody>
+          </p:sp>
+          <p:grpSp>
+            <p:nvGrpSpPr>
+              <p:cNvPr id="59" name="Groupe 58">
+                <a:extLst>
+                  <a:ext uri="{FF2B5EF4-FFF2-40B4-BE49-F238E27FC236}">
+                    <a16:creationId xmlns:a16="http://schemas.microsoft.com/office/drawing/2014/main" id="{E21247E2-F222-0709-D6DD-796A82062AA1}"/>
+                  </a:ext>
+                </a:extLst>
+              </p:cNvPr>
+              <p:cNvGrpSpPr/>
+              <p:nvPr/>
+            </p:nvGrpSpPr>
+            <p:grpSpPr>
+              <a:xfrm rot="5400000">
+                <a:off x="387498" y="1914533"/>
+                <a:ext cx="432048" cy="288031"/>
+                <a:chOff x="2286259" y="3513708"/>
+                <a:chExt cx="432048" cy="288031"/>
+              </a:xfrm>
+            </p:grpSpPr>
+            <p:sp>
+              <p:nvSpPr>
+                <p:cNvPr id="61" name="Forme libre : forme 60">
+                  <a:extLst>
+                    <a:ext uri="{FF2B5EF4-FFF2-40B4-BE49-F238E27FC236}">
+                      <a16:creationId xmlns:a16="http://schemas.microsoft.com/office/drawing/2014/main" id="{E8F20F61-D16E-C9EE-33CD-A79DF6241CB4}"/>
+                    </a:ext>
+                  </a:extLst>
+                </p:cNvPr>
+                <p:cNvSpPr/>
+                <p:nvPr/>
+              </p:nvSpPr>
+              <p:spPr>
+                <a:xfrm>
+                  <a:off x="2302852" y="3655813"/>
+                  <a:ext cx="415449" cy="145926"/>
+                </a:xfrm>
+                <a:custGeom>
+                  <a:avLst/>
+                  <a:gdLst>
+                    <a:gd name="connsiteX0" fmla="*/ 0 w 400050"/>
+                    <a:gd name="connsiteY0" fmla="*/ 6350 h 134622"/>
+                    <a:gd name="connsiteX1" fmla="*/ 63500 w 400050"/>
+                    <a:gd name="connsiteY1" fmla="*/ 114300 h 134622"/>
+                    <a:gd name="connsiteX2" fmla="*/ 203200 w 400050"/>
+                    <a:gd name="connsiteY2" fmla="*/ 69850 h 134622"/>
+                    <a:gd name="connsiteX3" fmla="*/ 304800 w 400050"/>
+                    <a:gd name="connsiteY3" fmla="*/ 133350 h 134622"/>
+                    <a:gd name="connsiteX4" fmla="*/ 400050 w 400050"/>
+                    <a:gd name="connsiteY4" fmla="*/ 0 h 134622"/>
+                  </a:gdLst>
+                  <a:ahLst/>
+                  <a:cxnLst>
+                    <a:cxn ang="0">
+                      <a:pos x="connsiteX0" y="connsiteY0"/>
+                    </a:cxn>
+                    <a:cxn ang="0">
+                      <a:pos x="connsiteX1" y="connsiteY1"/>
+                    </a:cxn>
+                    <a:cxn ang="0">
+                      <a:pos x="connsiteX2" y="connsiteY2"/>
+                    </a:cxn>
+                    <a:cxn ang="0">
+                      <a:pos x="connsiteX3" y="connsiteY3"/>
+                    </a:cxn>
+                    <a:cxn ang="0">
+                      <a:pos x="connsiteX4" y="connsiteY4"/>
+                    </a:cxn>
+                  </a:cxnLst>
+                  <a:rect l="l" t="t" r="r" b="b"/>
+                  <a:pathLst>
+                    <a:path w="400050" h="134622">
+                      <a:moveTo>
+                        <a:pt x="0" y="6350"/>
+                      </a:moveTo>
+                      <a:cubicBezTo>
+                        <a:pt x="14816" y="55033"/>
+                        <a:pt x="29633" y="103717"/>
+                        <a:pt x="63500" y="114300"/>
+                      </a:cubicBezTo>
+                      <a:cubicBezTo>
+                        <a:pt x="97367" y="124883"/>
+                        <a:pt x="162983" y="66675"/>
+                        <a:pt x="203200" y="69850"/>
+                      </a:cubicBezTo>
+                      <a:cubicBezTo>
+                        <a:pt x="243417" y="73025"/>
+                        <a:pt x="271992" y="144992"/>
+                        <a:pt x="304800" y="133350"/>
+                      </a:cubicBezTo>
+                      <a:cubicBezTo>
+                        <a:pt x="337608" y="121708"/>
+                        <a:pt x="368829" y="60854"/>
+                        <a:pt x="400050" y="0"/>
+                      </a:cubicBezTo>
+                    </a:path>
+                  </a:pathLst>
+                </a:custGeom>
+                <a:solidFill>
+                  <a:schemeClr val="bg1">
+                    <a:lumMod val="85000"/>
+                  </a:schemeClr>
+                </a:solidFill>
+                <a:ln w="19050">
+                  <a:solidFill>
+                    <a:schemeClr val="tx1"/>
+                  </a:solidFill>
+                </a:ln>
+              </p:spPr>
+              <p:style>
+                <a:lnRef idx="2">
+                  <a:schemeClr val="accent1">
+                    <a:shade val="50000"/>
+                  </a:schemeClr>
+                </a:lnRef>
+                <a:fillRef idx="1">
+                  <a:schemeClr val="accent1"/>
+                </a:fillRef>
+                <a:effectRef idx="0">
+                  <a:schemeClr val="accent1"/>
+                </a:effectRef>
+                <a:fontRef idx="minor">
+                  <a:schemeClr val="lt1"/>
+                </a:fontRef>
+              </p:style>
+              <p:txBody>
+                <a:bodyPr rtlCol="0" anchor="ctr"/>
+                <a:lstStyle/>
+                <a:p>
+                  <a:pPr algn="ctr"/>
+                  <a:endParaRPr lang="fr-FR"/>
+                </a:p>
+              </p:txBody>
+            </p:sp>
+            <p:cxnSp>
+              <p:nvCxnSpPr>
+                <p:cNvPr id="62" name="Connecteur droit 61">
+                  <a:extLst>
+                    <a:ext uri="{FF2B5EF4-FFF2-40B4-BE49-F238E27FC236}">
+                      <a16:creationId xmlns:a16="http://schemas.microsoft.com/office/drawing/2014/main" id="{9194674D-D472-95D3-5F58-29ED1BF70B23}"/>
+                    </a:ext>
+                  </a:extLst>
+                </p:cNvPr>
+                <p:cNvCxnSpPr>
+                  <a:cxnSpLocks/>
+                </p:cNvCxnSpPr>
+                <p:nvPr/>
+              </p:nvCxnSpPr>
+              <p:spPr>
+                <a:xfrm>
+                  <a:off x="2502283" y="3513708"/>
+                  <a:ext cx="0" cy="142105"/>
+                </a:xfrm>
+                <a:prstGeom prst="line">
+                  <a:avLst/>
+                </a:prstGeom>
+                <a:noFill/>
+                <a:ln w="28575">
+                  <a:solidFill>
+                    <a:schemeClr val="tx1"/>
+                  </a:solidFill>
+                </a:ln>
+              </p:spPr>
+              <p:style>
+                <a:lnRef idx="2">
+                  <a:schemeClr val="accent1">
+                    <a:shade val="50000"/>
+                  </a:schemeClr>
+                </a:lnRef>
+                <a:fillRef idx="1">
+                  <a:schemeClr val="accent1"/>
+                </a:fillRef>
+                <a:effectRef idx="0">
+                  <a:schemeClr val="accent1"/>
+                </a:effectRef>
+                <a:fontRef idx="minor">
+                  <a:schemeClr val="lt1"/>
+                </a:fontRef>
+              </p:style>
+            </p:cxnSp>
+            <p:cxnSp>
+              <p:nvCxnSpPr>
+                <p:cNvPr id="63" name="Connecteur droit 62">
+                  <a:extLst>
+                    <a:ext uri="{FF2B5EF4-FFF2-40B4-BE49-F238E27FC236}">
+                      <a16:creationId xmlns:a16="http://schemas.microsoft.com/office/drawing/2014/main" id="{9843362F-81C9-8792-A93C-8558D6641537}"/>
+                    </a:ext>
+                  </a:extLst>
+                </p:cNvPr>
+                <p:cNvCxnSpPr>
+                  <a:cxnSpLocks/>
+                </p:cNvCxnSpPr>
+                <p:nvPr/>
+              </p:nvCxnSpPr>
+              <p:spPr>
+                <a:xfrm flipH="1">
+                  <a:off x="2286259" y="3659633"/>
+                  <a:ext cx="432048" cy="0"/>
+                </a:xfrm>
+                <a:prstGeom prst="line">
+                  <a:avLst/>
+                </a:prstGeom>
+                <a:noFill/>
+                <a:ln w="28575">
+                  <a:solidFill>
+                    <a:schemeClr val="tx1"/>
+                  </a:solidFill>
+                </a:ln>
+              </p:spPr>
+              <p:style>
+                <a:lnRef idx="2">
+                  <a:schemeClr val="accent1">
+                    <a:shade val="50000"/>
+                  </a:schemeClr>
+                </a:lnRef>
+                <a:fillRef idx="1">
+                  <a:schemeClr val="accent1"/>
+                </a:fillRef>
+                <a:effectRef idx="0">
+                  <a:schemeClr val="accent1"/>
+                </a:effectRef>
+                <a:fontRef idx="minor">
+                  <a:schemeClr val="lt1"/>
+                </a:fontRef>
+              </p:style>
+            </p:cxnSp>
+          </p:grpSp>
+          <p:sp>
+            <p:nvSpPr>
+              <p:cNvPr id="60" name="Rectangle 59">
+                <a:extLst>
+                  <a:ext uri="{FF2B5EF4-FFF2-40B4-BE49-F238E27FC236}">
+                    <a16:creationId xmlns:a16="http://schemas.microsoft.com/office/drawing/2014/main" id="{9BA7A949-CB39-11B1-EF67-FA94CCF6B624}"/>
+                  </a:ext>
+                </a:extLst>
+              </p:cNvPr>
+              <p:cNvSpPr/>
+              <p:nvPr/>
+            </p:nvSpPr>
+            <p:spPr>
+              <a:xfrm rot="16200000">
+                <a:off x="743883" y="1977057"/>
+                <a:ext cx="180000" cy="180000"/>
+              </a:xfrm>
+              <a:prstGeom prst="rect">
+                <a:avLst/>
+              </a:prstGeom>
+              <a:solidFill>
+                <a:schemeClr val="bg1"/>
+              </a:solidFill>
+              <a:ln w="28575">
+                <a:solidFill>
+                  <a:schemeClr val="tx1"/>
+                </a:solidFill>
+              </a:ln>
+            </p:spPr>
+            <p:style>
+              <a:lnRef idx="2">
+                <a:schemeClr val="accent1">
+                  <a:shade val="50000"/>
+                </a:schemeClr>
+              </a:lnRef>
+              <a:fillRef idx="1">
+                <a:schemeClr val="accent1"/>
+              </a:fillRef>
+              <a:effectRef idx="0">
+                <a:schemeClr val="accent1"/>
+              </a:effectRef>
+              <a:fontRef idx="minor">
+                <a:schemeClr val="lt1"/>
+              </a:fontRef>
+            </p:style>
+            <p:txBody>
+              <a:bodyPr rtlCol="0" anchor="ctr"/>
+              <a:lstStyle/>
+              <a:p>
+                <a:pPr algn="ctr"/>
+                <a:endParaRPr lang="fr-FR"/>
+              </a:p>
+            </p:txBody>
+          </p:sp>
+        </p:grpSp>
+        <p:sp>
+          <p:nvSpPr>
+            <p:cNvPr id="8" name="Ellipse 7">
+              <a:extLst>
+                <a:ext uri="{FF2B5EF4-FFF2-40B4-BE49-F238E27FC236}">
+                  <a16:creationId xmlns:a16="http://schemas.microsoft.com/office/drawing/2014/main" id="{36E58AD8-4651-26B7-C6B3-03762E49A96F}"/>
+                </a:ext>
+              </a:extLst>
+            </p:cNvPr>
+            <p:cNvSpPr/>
+            <p:nvPr/>
+          </p:nvSpPr>
+          <p:spPr>
+            <a:xfrm>
+              <a:off x="5390638" y="3491309"/>
+              <a:ext cx="180000" cy="180000"/>
+            </a:xfrm>
+            <a:prstGeom prst="ellipse">
+              <a:avLst/>
+            </a:prstGeom>
+            <a:solidFill>
+              <a:schemeClr val="bg1"/>
+            </a:solidFill>
+            <a:ln w="19050">
+              <a:solidFill>
+                <a:srgbClr val="C00000"/>
+              </a:solidFill>
+            </a:ln>
+          </p:spPr>
+          <p:style>
+            <a:lnRef idx="2">
+              <a:schemeClr val="accent1">
+                <a:shade val="50000"/>
+              </a:schemeClr>
+            </a:lnRef>
+            <a:fillRef idx="1">
+              <a:schemeClr val="accent1"/>
+            </a:fillRef>
+            <a:effectRef idx="0">
+              <a:schemeClr val="accent1"/>
+            </a:effectRef>
+            <a:fontRef idx="minor">
+              <a:schemeClr val="lt1"/>
+            </a:fontRef>
+          </p:style>
+          <p:txBody>
+            <a:bodyPr rtlCol="0" anchor="ctr"/>
+            <a:lstStyle/>
+            <a:p>
+              <a:pPr algn="ctr"/>
+              <a:r>
+                <a:rPr lang="fr-FR" sz="1050" b="1" dirty="0">
+                  <a:solidFill>
+                    <a:srgbClr val="C00000"/>
+                  </a:solidFill>
+                </a:rPr>
+                <a:t>6</a:t>
+              </a:r>
+              <a:endParaRPr lang="fr-FR" sz="1400" b="1" dirty="0">
+                <a:solidFill>
+                  <a:srgbClr val="C00000"/>
+                </a:solidFill>
+              </a:endParaRPr>
+            </a:p>
+          </p:txBody>
+        </p:sp>
+        <p:cxnSp>
+          <p:nvCxnSpPr>
+            <p:cNvPr id="11" name="Connecteur droit 10">
+              <a:extLst>
+                <a:ext uri="{FF2B5EF4-FFF2-40B4-BE49-F238E27FC236}">
+                  <a16:creationId xmlns:a16="http://schemas.microsoft.com/office/drawing/2014/main" id="{E887D13C-6EA5-480D-6078-ED748852E0D8}"/>
+                </a:ext>
+              </a:extLst>
+            </p:cNvPr>
+            <p:cNvCxnSpPr>
+              <a:cxnSpLocks/>
+              <a:endCxn id="28" idx="0"/>
+            </p:cNvCxnSpPr>
+            <p:nvPr/>
+          </p:nvCxnSpPr>
+          <p:spPr>
+            <a:xfrm>
+              <a:off x="6730293" y="1553892"/>
+              <a:ext cx="0" cy="72000"/>
+            </a:xfrm>
+            <a:prstGeom prst="line">
+              <a:avLst/>
+            </a:prstGeom>
+            <a:noFill/>
+            <a:ln w="28575">
+              <a:solidFill>
+                <a:srgbClr val="0070C0"/>
+              </a:solidFill>
+            </a:ln>
+          </p:spPr>
+          <p:style>
+            <a:lnRef idx="2">
+              <a:schemeClr val="accent1">
+                <a:shade val="50000"/>
+              </a:schemeClr>
+            </a:lnRef>
+            <a:fillRef idx="1">
+              <a:schemeClr val="accent1"/>
+            </a:fillRef>
+            <a:effectRef idx="0">
+              <a:schemeClr val="accent1"/>
+            </a:effectRef>
+            <a:fontRef idx="minor">
+              <a:schemeClr val="lt1"/>
+            </a:fontRef>
+          </p:style>
+        </p:cxnSp>
+        <p:cxnSp>
+          <p:nvCxnSpPr>
+            <p:cNvPr id="12" name="Connecteur droit 11">
+              <a:extLst>
+                <a:ext uri="{FF2B5EF4-FFF2-40B4-BE49-F238E27FC236}">
+                  <a16:creationId xmlns:a16="http://schemas.microsoft.com/office/drawing/2014/main" id="{FE94A0E4-5500-3F69-FA97-BEAB9A121518}"/>
+                </a:ext>
+              </a:extLst>
+            </p:cNvPr>
+            <p:cNvCxnSpPr>
+              <a:cxnSpLocks/>
+            </p:cNvCxnSpPr>
+            <p:nvPr/>
+          </p:nvCxnSpPr>
+          <p:spPr>
+            <a:xfrm>
+              <a:off x="4932440" y="1556792"/>
+              <a:ext cx="3600000" cy="0"/>
+            </a:xfrm>
+            <a:prstGeom prst="line">
+              <a:avLst/>
+            </a:prstGeom>
+            <a:noFill/>
+            <a:ln w="28575">
+              <a:solidFill>
+                <a:srgbClr val="0070C0"/>
+              </a:solidFill>
+            </a:ln>
+          </p:spPr>
+          <p:style>
+            <a:lnRef idx="2">
+              <a:schemeClr val="accent1">
+                <a:shade val="50000"/>
+              </a:schemeClr>
+            </a:lnRef>
+            <a:fillRef idx="1">
+              <a:schemeClr val="accent1"/>
+            </a:fillRef>
+            <a:effectRef idx="0">
+              <a:schemeClr val="accent1"/>
+            </a:effectRef>
+            <a:fontRef idx="minor">
+              <a:schemeClr val="lt1"/>
+            </a:fontRef>
+          </p:style>
+        </p:cxnSp>
+        <p:cxnSp>
+          <p:nvCxnSpPr>
+            <p:cNvPr id="13" name="Connecteur droit 12">
+              <a:extLst>
+                <a:ext uri="{FF2B5EF4-FFF2-40B4-BE49-F238E27FC236}">
+                  <a16:creationId xmlns:a16="http://schemas.microsoft.com/office/drawing/2014/main" id="{CDB5471B-CE75-A2C0-E433-DEE3145B8898}"/>
+                </a:ext>
+              </a:extLst>
+            </p:cNvPr>
+            <p:cNvCxnSpPr>
+              <a:cxnSpLocks/>
+            </p:cNvCxnSpPr>
+            <p:nvPr/>
+          </p:nvCxnSpPr>
+          <p:spPr>
+            <a:xfrm flipV="1">
+              <a:off x="4931556" y="1231643"/>
+              <a:ext cx="0" cy="325149"/>
+            </a:xfrm>
+            <a:prstGeom prst="line">
+              <a:avLst/>
+            </a:prstGeom>
+            <a:noFill/>
+            <a:ln w="28575">
+              <a:solidFill>
+                <a:srgbClr val="0070C0"/>
+              </a:solidFill>
+            </a:ln>
+          </p:spPr>
+          <p:style>
+            <a:lnRef idx="2">
+              <a:schemeClr val="accent1">
+                <a:shade val="50000"/>
+              </a:schemeClr>
+            </a:lnRef>
+            <a:fillRef idx="1">
+              <a:schemeClr val="accent1"/>
+            </a:fillRef>
+            <a:effectRef idx="0">
+              <a:schemeClr val="accent1"/>
+            </a:effectRef>
+            <a:fontRef idx="minor">
+              <a:schemeClr val="lt1"/>
+            </a:fontRef>
+          </p:style>
+        </p:cxnSp>
+        <p:cxnSp>
+          <p:nvCxnSpPr>
+            <p:cNvPr id="14" name="Connecteur droit 13">
+              <a:extLst>
+                <a:ext uri="{FF2B5EF4-FFF2-40B4-BE49-F238E27FC236}">
+                  <a16:creationId xmlns:a16="http://schemas.microsoft.com/office/drawing/2014/main" id="{1A73B1D6-177B-2AE6-71D3-E80B12AAD635}"/>
+                </a:ext>
+              </a:extLst>
+            </p:cNvPr>
+            <p:cNvCxnSpPr>
+              <a:cxnSpLocks/>
+            </p:cNvCxnSpPr>
+            <p:nvPr/>
+          </p:nvCxnSpPr>
+          <p:spPr>
+            <a:xfrm flipV="1">
+              <a:off x="8532440" y="1231643"/>
+              <a:ext cx="0" cy="325149"/>
+            </a:xfrm>
+            <a:prstGeom prst="line">
+              <a:avLst/>
+            </a:prstGeom>
+            <a:noFill/>
+            <a:ln w="28575">
+              <a:solidFill>
+                <a:srgbClr val="0070C0"/>
+              </a:solidFill>
+            </a:ln>
+          </p:spPr>
+          <p:style>
+            <a:lnRef idx="2">
+              <a:schemeClr val="accent1">
+                <a:shade val="50000"/>
+              </a:schemeClr>
+            </a:lnRef>
+            <a:fillRef idx="1">
+              <a:schemeClr val="accent1"/>
+            </a:fillRef>
+            <a:effectRef idx="0">
+              <a:schemeClr val="accent1"/>
+            </a:effectRef>
+            <a:fontRef idx="minor">
+              <a:schemeClr val="lt1"/>
+            </a:fontRef>
+          </p:style>
+        </p:cxnSp>
+        <p:cxnSp>
+          <p:nvCxnSpPr>
+            <p:cNvPr id="15" name="Connecteur droit 14">
+              <a:extLst>
+                <a:ext uri="{FF2B5EF4-FFF2-40B4-BE49-F238E27FC236}">
+                  <a16:creationId xmlns:a16="http://schemas.microsoft.com/office/drawing/2014/main" id="{B50253E5-9A9E-72A8-A347-66958BE51A40}"/>
+                </a:ext>
+              </a:extLst>
+            </p:cNvPr>
+            <p:cNvCxnSpPr>
+              <a:cxnSpLocks/>
+              <a:stCxn id="60" idx="3"/>
+            </p:cNvCxnSpPr>
+            <p:nvPr/>
+          </p:nvCxnSpPr>
+          <p:spPr>
+            <a:xfrm flipV="1">
+              <a:off x="4800942" y="3438565"/>
+              <a:ext cx="0" cy="52959"/>
+            </a:xfrm>
+            <a:prstGeom prst="line">
+              <a:avLst/>
+            </a:prstGeom>
+            <a:noFill/>
+            <a:ln w="28575">
+              <a:solidFill>
+                <a:srgbClr val="C00000"/>
+              </a:solidFill>
+            </a:ln>
+          </p:spPr>
+          <p:style>
+            <a:lnRef idx="2">
+              <a:schemeClr val="accent1">
+                <a:shade val="50000"/>
+              </a:schemeClr>
+            </a:lnRef>
+            <a:fillRef idx="1">
+              <a:schemeClr val="accent1"/>
+            </a:fillRef>
+            <a:effectRef idx="0">
+              <a:schemeClr val="accent1"/>
+            </a:effectRef>
+            <a:fontRef idx="minor">
+              <a:schemeClr val="lt1"/>
+            </a:fontRef>
+          </p:style>
+        </p:cxnSp>
+        <p:cxnSp>
+          <p:nvCxnSpPr>
+            <p:cNvPr id="16" name="Connecteur droit 15">
+              <a:extLst>
+                <a:ext uri="{FF2B5EF4-FFF2-40B4-BE49-F238E27FC236}">
+                  <a16:creationId xmlns:a16="http://schemas.microsoft.com/office/drawing/2014/main" id="{38BCF306-A111-1284-5BA8-ADB74E8812A5}"/>
+                </a:ext>
+              </a:extLst>
+            </p:cNvPr>
+            <p:cNvCxnSpPr>
+              <a:cxnSpLocks/>
+            </p:cNvCxnSpPr>
+            <p:nvPr/>
+          </p:nvCxnSpPr>
+          <p:spPr>
+            <a:xfrm>
+              <a:off x="4712769" y="3491523"/>
+              <a:ext cx="180000" cy="180000"/>
+            </a:xfrm>
+            <a:prstGeom prst="line">
+              <a:avLst/>
+            </a:prstGeom>
+            <a:noFill/>
+            <a:ln w="28575">
+              <a:solidFill>
+                <a:srgbClr val="C00000"/>
+              </a:solidFill>
+            </a:ln>
+          </p:spPr>
+          <p:style>
+            <a:lnRef idx="2">
+              <a:schemeClr val="accent1">
+                <a:shade val="50000"/>
+              </a:schemeClr>
+            </a:lnRef>
+            <a:fillRef idx="1">
+              <a:schemeClr val="accent1"/>
+            </a:fillRef>
+            <a:effectRef idx="0">
+              <a:schemeClr val="accent1"/>
+            </a:effectRef>
+            <a:fontRef idx="minor">
+              <a:schemeClr val="lt1"/>
+            </a:fontRef>
+          </p:style>
+        </p:cxnSp>
+        <p:cxnSp>
+          <p:nvCxnSpPr>
+            <p:cNvPr id="17" name="Connecteur droit 16">
+              <a:extLst>
+                <a:ext uri="{FF2B5EF4-FFF2-40B4-BE49-F238E27FC236}">
+                  <a16:creationId xmlns:a16="http://schemas.microsoft.com/office/drawing/2014/main" id="{F0C8C1AE-0362-D342-322C-84EFC243CD8A}"/>
+                </a:ext>
+              </a:extLst>
+            </p:cNvPr>
+            <p:cNvCxnSpPr>
+              <a:cxnSpLocks/>
+            </p:cNvCxnSpPr>
+            <p:nvPr/>
+          </p:nvCxnSpPr>
+          <p:spPr>
+            <a:xfrm flipH="1">
+              <a:off x="4712738" y="3489267"/>
+              <a:ext cx="180000" cy="180000"/>
+            </a:xfrm>
+            <a:prstGeom prst="line">
+              <a:avLst/>
+            </a:prstGeom>
+            <a:noFill/>
+            <a:ln w="28575">
+              <a:solidFill>
+                <a:srgbClr val="C00000"/>
+              </a:solidFill>
+            </a:ln>
+          </p:spPr>
+          <p:style>
+            <a:lnRef idx="2">
+              <a:schemeClr val="accent1">
+                <a:shade val="50000"/>
+              </a:schemeClr>
+            </a:lnRef>
+            <a:fillRef idx="1">
+              <a:schemeClr val="accent1"/>
+            </a:fillRef>
+            <a:effectRef idx="0">
+              <a:schemeClr val="accent1"/>
+            </a:effectRef>
+            <a:fontRef idx="minor">
+              <a:schemeClr val="lt1"/>
+            </a:fontRef>
+          </p:style>
+        </p:cxnSp>
+        <p:sp>
+          <p:nvSpPr>
+            <p:cNvPr id="20" name="Ellipse 19">
+              <a:extLst>
+                <a:ext uri="{FF2B5EF4-FFF2-40B4-BE49-F238E27FC236}">
+                  <a16:creationId xmlns:a16="http://schemas.microsoft.com/office/drawing/2014/main" id="{D767FF88-373C-095F-3E1E-DAD4E35AA031}"/>
+                </a:ext>
+              </a:extLst>
+            </p:cNvPr>
+            <p:cNvSpPr/>
+            <p:nvPr/>
+          </p:nvSpPr>
+          <p:spPr>
+            <a:xfrm>
+              <a:off x="5003731" y="1292529"/>
+              <a:ext cx="216000" cy="216000"/>
+            </a:xfrm>
+            <a:prstGeom prst="ellipse">
+              <a:avLst/>
+            </a:prstGeom>
+            <a:solidFill>
+              <a:schemeClr val="bg1"/>
+            </a:solidFill>
+            <a:ln w="19050">
+              <a:solidFill>
+                <a:srgbClr val="0070C0"/>
+              </a:solidFill>
+            </a:ln>
+          </p:spPr>
+          <p:style>
+            <a:lnRef idx="2">
+              <a:schemeClr val="accent1">
+                <a:shade val="50000"/>
+              </a:schemeClr>
+            </a:lnRef>
+            <a:fillRef idx="1">
+              <a:schemeClr val="accent1"/>
+            </a:fillRef>
+            <a:effectRef idx="0">
+              <a:schemeClr val="accent1"/>
+            </a:effectRef>
+            <a:fontRef idx="minor">
+              <a:schemeClr val="lt1"/>
+            </a:fontRef>
+          </p:style>
+          <p:txBody>
+            <a:bodyPr lIns="0" tIns="0" rIns="0" bIns="0" rtlCol="0" anchor="ctr"/>
+            <a:lstStyle/>
+            <a:p>
+              <a:pPr algn="ctr"/>
+              <a:r>
+                <a:rPr lang="fr-FR" sz="1000" b="1" dirty="0">
+                  <a:solidFill>
+                    <a:srgbClr val="0070C0"/>
+                  </a:solidFill>
+                </a:rPr>
+                <a:t>11</a:t>
+              </a:r>
+              <a:endParaRPr lang="fr-FR" sz="1200" b="1" dirty="0">
+                <a:solidFill>
+                  <a:srgbClr val="0070C0"/>
+                </a:solidFill>
+              </a:endParaRPr>
+            </a:p>
+          </p:txBody>
+        </p:sp>
+        <p:cxnSp>
+          <p:nvCxnSpPr>
+            <p:cNvPr id="21" name="Connecteur droit 20">
+              <a:extLst>
+                <a:ext uri="{FF2B5EF4-FFF2-40B4-BE49-F238E27FC236}">
+                  <a16:creationId xmlns:a16="http://schemas.microsoft.com/office/drawing/2014/main" id="{3DBDEB2B-A02B-DA07-8381-2BBC2880BA1C}"/>
+                </a:ext>
+              </a:extLst>
+            </p:cNvPr>
+            <p:cNvCxnSpPr>
+              <a:cxnSpLocks/>
+            </p:cNvCxnSpPr>
+            <p:nvPr/>
+          </p:nvCxnSpPr>
+          <p:spPr>
+            <a:xfrm flipV="1">
+              <a:off x="6738819" y="3360259"/>
+              <a:ext cx="0" cy="72000"/>
+            </a:xfrm>
+            <a:prstGeom prst="line">
+              <a:avLst/>
+            </a:prstGeom>
+            <a:noFill/>
+            <a:ln w="28575">
+              <a:solidFill>
+                <a:srgbClr val="C00000"/>
+              </a:solidFill>
+            </a:ln>
+          </p:spPr>
+          <p:style>
+            <a:lnRef idx="2">
+              <a:schemeClr val="accent1">
+                <a:shade val="50000"/>
+              </a:schemeClr>
+            </a:lnRef>
+            <a:fillRef idx="1">
+              <a:schemeClr val="accent1"/>
+            </a:fillRef>
+            <a:effectRef idx="0">
+              <a:schemeClr val="accent1"/>
+            </a:effectRef>
+            <a:fontRef idx="minor">
+              <a:schemeClr val="lt1"/>
+            </a:fontRef>
+          </p:style>
+        </p:cxnSp>
+        <p:cxnSp>
+          <p:nvCxnSpPr>
+            <p:cNvPr id="22" name="Connecteur droit 21">
+              <a:extLst>
+                <a:ext uri="{FF2B5EF4-FFF2-40B4-BE49-F238E27FC236}">
+                  <a16:creationId xmlns:a16="http://schemas.microsoft.com/office/drawing/2014/main" id="{7CA250D4-AF9F-75C8-262C-5C8CAABCB71A}"/>
+                </a:ext>
+              </a:extLst>
+            </p:cNvPr>
+            <p:cNvCxnSpPr>
+              <a:cxnSpLocks/>
+            </p:cNvCxnSpPr>
+            <p:nvPr/>
+          </p:nvCxnSpPr>
+          <p:spPr>
+            <a:xfrm>
+              <a:off x="4800942" y="3438565"/>
+              <a:ext cx="3659490" cy="0"/>
+            </a:xfrm>
+            <a:prstGeom prst="line">
+              <a:avLst/>
+            </a:prstGeom>
+            <a:noFill/>
+            <a:ln w="28575">
+              <a:solidFill>
+                <a:srgbClr val="C00000"/>
+              </a:solidFill>
+            </a:ln>
+          </p:spPr>
+          <p:style>
+            <a:lnRef idx="2">
+              <a:schemeClr val="accent1">
+                <a:shade val="50000"/>
+              </a:schemeClr>
+            </a:lnRef>
+            <a:fillRef idx="1">
+              <a:schemeClr val="accent1"/>
+            </a:fillRef>
+            <a:effectRef idx="0">
+              <a:schemeClr val="accent1"/>
+            </a:effectRef>
+            <a:fontRef idx="minor">
+              <a:schemeClr val="lt1"/>
+            </a:fontRef>
+          </p:style>
+        </p:cxnSp>
+        <p:grpSp>
+          <p:nvGrpSpPr>
+            <p:cNvPr id="23" name="Groupe 22">
+              <a:extLst>
+                <a:ext uri="{FF2B5EF4-FFF2-40B4-BE49-F238E27FC236}">
+                  <a16:creationId xmlns:a16="http://schemas.microsoft.com/office/drawing/2014/main" id="{4FCEFC55-477B-1277-9155-7BF55B880F4D}"/>
+                </a:ext>
+              </a:extLst>
+            </p:cNvPr>
+            <p:cNvGrpSpPr/>
+            <p:nvPr/>
+          </p:nvGrpSpPr>
+          <p:grpSpPr>
+            <a:xfrm>
+              <a:off x="5161239" y="3128093"/>
+              <a:ext cx="288000" cy="288000"/>
+              <a:chOff x="4943745" y="2850212"/>
+              <a:chExt cx="288000" cy="288000"/>
+            </a:xfrm>
+          </p:grpSpPr>
+          <p:sp>
+            <p:nvSpPr>
+              <p:cNvPr id="55" name="Ellipse 54">
+                <a:extLst>
+                  <a:ext uri="{FF2B5EF4-FFF2-40B4-BE49-F238E27FC236}">
+                    <a16:creationId xmlns:a16="http://schemas.microsoft.com/office/drawing/2014/main" id="{D1E2ECE2-C58C-4527-DE57-9FD7D31BF683}"/>
+                  </a:ext>
+                </a:extLst>
+              </p:cNvPr>
+              <p:cNvSpPr/>
+              <p:nvPr/>
+            </p:nvSpPr>
+            <p:spPr>
+              <a:xfrm>
+                <a:off x="4943745" y="2850212"/>
+                <a:ext cx="288000" cy="288000"/>
+              </a:xfrm>
+              <a:prstGeom prst="ellipse">
+                <a:avLst/>
+              </a:prstGeom>
+              <a:solidFill>
+                <a:schemeClr val="bg1"/>
+              </a:solidFill>
+              <a:ln w="28575">
+                <a:solidFill>
+                  <a:srgbClr val="00B0F0"/>
+                </a:solidFill>
+              </a:ln>
+            </p:spPr>
+            <p:style>
+              <a:lnRef idx="2">
+                <a:schemeClr val="accent1">
+                  <a:shade val="50000"/>
+                </a:schemeClr>
+              </a:lnRef>
+              <a:fillRef idx="1">
+                <a:schemeClr val="accent1"/>
+              </a:fillRef>
+              <a:effectRef idx="0">
+                <a:schemeClr val="accent1"/>
+              </a:effectRef>
+              <a:fontRef idx="minor">
+                <a:schemeClr val="lt1"/>
+              </a:fontRef>
+            </p:style>
+            <p:txBody>
+              <a:bodyPr rtlCol="0" anchor="ctr"/>
+              <a:lstStyle/>
+              <a:p>
+                <a:pPr algn="ctr"/>
+                <a:endParaRPr lang="fr-FR" dirty="0"/>
+              </a:p>
+            </p:txBody>
+          </p:sp>
+          <p:cxnSp>
+            <p:nvCxnSpPr>
+              <p:cNvPr id="56" name="Connecteur droit 55">
+                <a:extLst>
+                  <a:ext uri="{FF2B5EF4-FFF2-40B4-BE49-F238E27FC236}">
+                    <a16:creationId xmlns:a16="http://schemas.microsoft.com/office/drawing/2014/main" id="{1906EB7D-A735-DF94-562A-770BEB91CEF2}"/>
+                  </a:ext>
+                </a:extLst>
+              </p:cNvPr>
+              <p:cNvCxnSpPr>
+                <a:cxnSpLocks/>
+                <a:stCxn id="55" idx="1"/>
+                <a:endCxn id="57" idx="5"/>
+              </p:cNvCxnSpPr>
+              <p:nvPr/>
+            </p:nvCxnSpPr>
+            <p:spPr>
+              <a:xfrm>
+                <a:off x="4985922" y="2892389"/>
+                <a:ext cx="165463" cy="165463"/>
+              </a:xfrm>
+              <a:prstGeom prst="line">
+                <a:avLst/>
+              </a:prstGeom>
+              <a:noFill/>
+              <a:ln w="28575">
+                <a:solidFill>
+                  <a:srgbClr val="00B0F0"/>
+                </a:solidFill>
+              </a:ln>
+            </p:spPr>
+            <p:style>
+              <a:lnRef idx="2">
+                <a:schemeClr val="accent1">
+                  <a:shade val="50000"/>
+                </a:schemeClr>
+              </a:lnRef>
+              <a:fillRef idx="1">
+                <a:schemeClr val="accent1"/>
+              </a:fillRef>
+              <a:effectRef idx="0">
+                <a:schemeClr val="accent1"/>
+              </a:effectRef>
+              <a:fontRef idx="minor">
+                <a:schemeClr val="lt1"/>
+              </a:fontRef>
+            </p:style>
+          </p:cxnSp>
+          <p:sp>
+            <p:nvSpPr>
+              <p:cNvPr id="57" name="Ellipse 56">
+                <a:extLst>
+                  <a:ext uri="{FF2B5EF4-FFF2-40B4-BE49-F238E27FC236}">
+                    <a16:creationId xmlns:a16="http://schemas.microsoft.com/office/drawing/2014/main" id="{3D0EE600-E1F0-5680-7E9B-5CF30BE36F1F}"/>
+                  </a:ext>
+                </a:extLst>
+              </p:cNvPr>
+              <p:cNvSpPr/>
+              <p:nvPr/>
+            </p:nvSpPr>
+            <p:spPr>
+              <a:xfrm>
+                <a:off x="4997745" y="2904212"/>
+                <a:ext cx="180000" cy="180000"/>
+              </a:xfrm>
+              <a:prstGeom prst="ellipse">
+                <a:avLst/>
+              </a:prstGeom>
+              <a:solidFill>
+                <a:schemeClr val="bg1"/>
+              </a:solidFill>
+              <a:ln w="28575">
+                <a:solidFill>
+                  <a:srgbClr val="00B0F0"/>
+                </a:solidFill>
+              </a:ln>
+            </p:spPr>
+            <p:style>
+              <a:lnRef idx="2">
+                <a:schemeClr val="accent1">
+                  <a:shade val="50000"/>
+                </a:schemeClr>
+              </a:lnRef>
+              <a:fillRef idx="1">
+                <a:schemeClr val="accent1"/>
+              </a:fillRef>
+              <a:effectRef idx="0">
+                <a:schemeClr val="accent1"/>
+              </a:effectRef>
+              <a:fontRef idx="minor">
+                <a:schemeClr val="lt1"/>
+              </a:fontRef>
+            </p:style>
+            <p:txBody>
+              <a:bodyPr rtlCol="0" anchor="ctr"/>
+              <a:lstStyle/>
+              <a:p>
+                <a:pPr algn="ctr"/>
+                <a:endParaRPr lang="fr-FR" dirty="0"/>
+              </a:p>
+            </p:txBody>
+          </p:sp>
+        </p:grpSp>
+        <p:grpSp>
+          <p:nvGrpSpPr>
+            <p:cNvPr id="24" name="Groupe 23">
+              <a:extLst>
+                <a:ext uri="{FF2B5EF4-FFF2-40B4-BE49-F238E27FC236}">
+                  <a16:creationId xmlns:a16="http://schemas.microsoft.com/office/drawing/2014/main" id="{29DA8E56-286F-CEA6-5F6A-63BFFE4628E7}"/>
+                </a:ext>
+              </a:extLst>
+            </p:cNvPr>
+            <p:cNvGrpSpPr/>
+            <p:nvPr/>
+          </p:nvGrpSpPr>
+          <p:grpSpPr>
+            <a:xfrm>
+              <a:off x="8028400" y="3128093"/>
+              <a:ext cx="288000" cy="288000"/>
+              <a:chOff x="4943745" y="2850212"/>
+              <a:chExt cx="288000" cy="288000"/>
+            </a:xfrm>
+          </p:grpSpPr>
+          <p:sp>
+            <p:nvSpPr>
+              <p:cNvPr id="52" name="Ellipse 51">
+                <a:extLst>
+                  <a:ext uri="{FF2B5EF4-FFF2-40B4-BE49-F238E27FC236}">
+                    <a16:creationId xmlns:a16="http://schemas.microsoft.com/office/drawing/2014/main" id="{0864AE79-6660-1B21-B0B9-7570A8DFF78F}"/>
+                  </a:ext>
+                </a:extLst>
+              </p:cNvPr>
+              <p:cNvSpPr/>
+              <p:nvPr/>
+            </p:nvSpPr>
+            <p:spPr>
+              <a:xfrm>
+                <a:off x="4943745" y="2850212"/>
+                <a:ext cx="288000" cy="288000"/>
+              </a:xfrm>
+              <a:prstGeom prst="ellipse">
+                <a:avLst/>
+              </a:prstGeom>
+              <a:solidFill>
+                <a:schemeClr val="bg1"/>
+              </a:solidFill>
+              <a:ln w="28575">
+                <a:solidFill>
+                  <a:srgbClr val="00B0F0"/>
+                </a:solidFill>
+              </a:ln>
+            </p:spPr>
+            <p:style>
+              <a:lnRef idx="2">
+                <a:schemeClr val="accent1">
+                  <a:shade val="50000"/>
+                </a:schemeClr>
+              </a:lnRef>
+              <a:fillRef idx="1">
+                <a:schemeClr val="accent1"/>
+              </a:fillRef>
+              <a:effectRef idx="0">
+                <a:schemeClr val="accent1"/>
+              </a:effectRef>
+              <a:fontRef idx="minor">
+                <a:schemeClr val="lt1"/>
+              </a:fontRef>
+            </p:style>
+            <p:txBody>
+              <a:bodyPr rtlCol="0" anchor="ctr"/>
+              <a:lstStyle/>
+              <a:p>
+                <a:pPr algn="ctr"/>
+                <a:endParaRPr lang="fr-FR" dirty="0"/>
+              </a:p>
+            </p:txBody>
+          </p:sp>
+          <p:cxnSp>
+            <p:nvCxnSpPr>
+              <p:cNvPr id="53" name="Connecteur droit 52">
+                <a:extLst>
+                  <a:ext uri="{FF2B5EF4-FFF2-40B4-BE49-F238E27FC236}">
+                    <a16:creationId xmlns:a16="http://schemas.microsoft.com/office/drawing/2014/main" id="{9EECE0E5-EDA2-D586-F244-F5AEF5B5DDDF}"/>
+                  </a:ext>
+                </a:extLst>
+              </p:cNvPr>
+              <p:cNvCxnSpPr>
+                <a:cxnSpLocks/>
+                <a:stCxn id="52" idx="1"/>
+                <a:endCxn id="54" idx="5"/>
+              </p:cNvCxnSpPr>
+              <p:nvPr/>
+            </p:nvCxnSpPr>
+            <p:spPr>
+              <a:xfrm>
+                <a:off x="4985922" y="2892389"/>
+                <a:ext cx="165463" cy="165463"/>
+              </a:xfrm>
+              <a:prstGeom prst="line">
+                <a:avLst/>
+              </a:prstGeom>
+              <a:noFill/>
+              <a:ln w="28575">
+                <a:solidFill>
+                  <a:srgbClr val="00B0F0"/>
+                </a:solidFill>
+              </a:ln>
+            </p:spPr>
+            <p:style>
+              <a:lnRef idx="2">
+                <a:schemeClr val="accent1">
+                  <a:shade val="50000"/>
+                </a:schemeClr>
+              </a:lnRef>
+              <a:fillRef idx="1">
+                <a:schemeClr val="accent1"/>
+              </a:fillRef>
+              <a:effectRef idx="0">
+                <a:schemeClr val="accent1"/>
+              </a:effectRef>
+              <a:fontRef idx="minor">
+                <a:schemeClr val="lt1"/>
+              </a:fontRef>
+            </p:style>
+          </p:cxnSp>
+          <p:sp>
+            <p:nvSpPr>
+              <p:cNvPr id="54" name="Ellipse 53">
+                <a:extLst>
+                  <a:ext uri="{FF2B5EF4-FFF2-40B4-BE49-F238E27FC236}">
+                    <a16:creationId xmlns:a16="http://schemas.microsoft.com/office/drawing/2014/main" id="{387A704A-CEB0-6F60-1FC2-7C0407653B58}"/>
+                  </a:ext>
+                </a:extLst>
+              </p:cNvPr>
+              <p:cNvSpPr/>
+              <p:nvPr/>
+            </p:nvSpPr>
+            <p:spPr>
+              <a:xfrm>
+                <a:off x="4997745" y="2904212"/>
+                <a:ext cx="180000" cy="180000"/>
+              </a:xfrm>
+              <a:prstGeom prst="ellipse">
+                <a:avLst/>
+              </a:prstGeom>
+              <a:solidFill>
+                <a:schemeClr val="bg1"/>
+              </a:solidFill>
+              <a:ln w="28575">
+                <a:solidFill>
+                  <a:srgbClr val="00B0F0"/>
+                </a:solidFill>
+              </a:ln>
+            </p:spPr>
+            <p:style>
+              <a:lnRef idx="2">
+                <a:schemeClr val="accent1">
+                  <a:shade val="50000"/>
+                </a:schemeClr>
+              </a:lnRef>
+              <a:fillRef idx="1">
+                <a:schemeClr val="accent1"/>
+              </a:fillRef>
+              <a:effectRef idx="0">
+                <a:schemeClr val="accent1"/>
+              </a:effectRef>
+              <a:fontRef idx="minor">
+                <a:schemeClr val="lt1"/>
+              </a:fontRef>
+            </p:style>
+            <p:txBody>
+              <a:bodyPr rtlCol="0" anchor="ctr"/>
+              <a:lstStyle/>
+              <a:p>
+                <a:pPr algn="ctr"/>
+                <a:endParaRPr lang="fr-FR" dirty="0"/>
+              </a:p>
+            </p:txBody>
+          </p:sp>
+        </p:grpSp>
+        <p:grpSp>
+          <p:nvGrpSpPr>
+            <p:cNvPr id="25" name="Groupe 24">
+              <a:extLst>
+                <a:ext uri="{FF2B5EF4-FFF2-40B4-BE49-F238E27FC236}">
+                  <a16:creationId xmlns:a16="http://schemas.microsoft.com/office/drawing/2014/main" id="{09578C68-DA54-5C41-7559-973FAFFFE245}"/>
+                </a:ext>
+              </a:extLst>
+            </p:cNvPr>
+            <p:cNvGrpSpPr/>
+            <p:nvPr/>
+          </p:nvGrpSpPr>
+          <p:grpSpPr>
+            <a:xfrm>
+              <a:off x="8028400" y="1579265"/>
+              <a:ext cx="288000" cy="288000"/>
+              <a:chOff x="4943745" y="2850212"/>
+              <a:chExt cx="288000" cy="288000"/>
+            </a:xfrm>
+          </p:grpSpPr>
+          <p:sp>
+            <p:nvSpPr>
+              <p:cNvPr id="49" name="Ellipse 48">
+                <a:extLst>
+                  <a:ext uri="{FF2B5EF4-FFF2-40B4-BE49-F238E27FC236}">
+                    <a16:creationId xmlns:a16="http://schemas.microsoft.com/office/drawing/2014/main" id="{16CC6A8E-C8C9-3386-4D7E-235D70DEF060}"/>
+                  </a:ext>
+                </a:extLst>
+              </p:cNvPr>
+              <p:cNvSpPr/>
+              <p:nvPr/>
+            </p:nvSpPr>
+            <p:spPr>
+              <a:xfrm>
+                <a:off x="4943745" y="2850212"/>
+                <a:ext cx="288000" cy="288000"/>
+              </a:xfrm>
+              <a:prstGeom prst="ellipse">
+                <a:avLst/>
+              </a:prstGeom>
+              <a:solidFill>
+                <a:schemeClr val="bg1"/>
+              </a:solidFill>
+              <a:ln w="28575">
+                <a:solidFill>
+                  <a:srgbClr val="00B0F0"/>
+                </a:solidFill>
+              </a:ln>
+            </p:spPr>
+            <p:style>
+              <a:lnRef idx="2">
+                <a:schemeClr val="accent1">
+                  <a:shade val="50000"/>
+                </a:schemeClr>
+              </a:lnRef>
+              <a:fillRef idx="1">
+                <a:schemeClr val="accent1"/>
+              </a:fillRef>
+              <a:effectRef idx="0">
+                <a:schemeClr val="accent1"/>
+              </a:effectRef>
+              <a:fontRef idx="minor">
+                <a:schemeClr val="lt1"/>
+              </a:fontRef>
+            </p:style>
+            <p:txBody>
+              <a:bodyPr rtlCol="0" anchor="ctr"/>
+              <a:lstStyle/>
+              <a:p>
+                <a:pPr algn="ctr"/>
+                <a:endParaRPr lang="fr-FR" dirty="0"/>
+              </a:p>
+            </p:txBody>
+          </p:sp>
+          <p:cxnSp>
+            <p:nvCxnSpPr>
+              <p:cNvPr id="50" name="Connecteur droit 49">
+                <a:extLst>
+                  <a:ext uri="{FF2B5EF4-FFF2-40B4-BE49-F238E27FC236}">
+                    <a16:creationId xmlns:a16="http://schemas.microsoft.com/office/drawing/2014/main" id="{95C5E632-DE19-5290-8977-6BECABEB3A33}"/>
+                  </a:ext>
+                </a:extLst>
+              </p:cNvPr>
+              <p:cNvCxnSpPr>
+                <a:cxnSpLocks/>
+                <a:stCxn id="49" idx="1"/>
+                <a:endCxn id="51" idx="5"/>
+              </p:cNvCxnSpPr>
+              <p:nvPr/>
+            </p:nvCxnSpPr>
+            <p:spPr>
+              <a:xfrm>
+                <a:off x="4985922" y="2892389"/>
+                <a:ext cx="165463" cy="165463"/>
+              </a:xfrm>
+              <a:prstGeom prst="line">
+                <a:avLst/>
+              </a:prstGeom>
+              <a:noFill/>
+              <a:ln w="28575">
+                <a:solidFill>
+                  <a:srgbClr val="00B0F0"/>
+                </a:solidFill>
+              </a:ln>
+            </p:spPr>
+            <p:style>
+              <a:lnRef idx="2">
+                <a:schemeClr val="accent1">
+                  <a:shade val="50000"/>
+                </a:schemeClr>
+              </a:lnRef>
+              <a:fillRef idx="1">
+                <a:schemeClr val="accent1"/>
+              </a:fillRef>
+              <a:effectRef idx="0">
+                <a:schemeClr val="accent1"/>
+              </a:effectRef>
+              <a:fontRef idx="minor">
+                <a:schemeClr val="lt1"/>
+              </a:fontRef>
+            </p:style>
+          </p:cxnSp>
+          <p:sp>
+            <p:nvSpPr>
+              <p:cNvPr id="51" name="Ellipse 50">
+                <a:extLst>
+                  <a:ext uri="{FF2B5EF4-FFF2-40B4-BE49-F238E27FC236}">
+                    <a16:creationId xmlns:a16="http://schemas.microsoft.com/office/drawing/2014/main" id="{1CB53728-14F2-54CA-D906-2F9C5968A807}"/>
+                  </a:ext>
+                </a:extLst>
+              </p:cNvPr>
+              <p:cNvSpPr/>
+              <p:nvPr/>
+            </p:nvSpPr>
+            <p:spPr>
+              <a:xfrm>
+                <a:off x="4997745" y="2904212"/>
+                <a:ext cx="180000" cy="180000"/>
+              </a:xfrm>
+              <a:prstGeom prst="ellipse">
+                <a:avLst/>
+              </a:prstGeom>
+              <a:solidFill>
+                <a:schemeClr val="bg1"/>
+              </a:solidFill>
+              <a:ln w="28575">
+                <a:solidFill>
+                  <a:srgbClr val="00B0F0"/>
+                </a:solidFill>
+              </a:ln>
+            </p:spPr>
+            <p:style>
+              <a:lnRef idx="2">
+                <a:schemeClr val="accent1">
+                  <a:shade val="50000"/>
+                </a:schemeClr>
+              </a:lnRef>
+              <a:fillRef idx="1">
+                <a:schemeClr val="accent1"/>
+              </a:fillRef>
+              <a:effectRef idx="0">
+                <a:schemeClr val="accent1"/>
+              </a:effectRef>
+              <a:fontRef idx="minor">
+                <a:schemeClr val="lt1"/>
+              </a:fontRef>
+            </p:style>
+            <p:txBody>
+              <a:bodyPr rtlCol="0" anchor="ctr"/>
+              <a:lstStyle/>
+              <a:p>
+                <a:pPr algn="ctr"/>
+                <a:endParaRPr lang="fr-FR" dirty="0"/>
+              </a:p>
+            </p:txBody>
+          </p:sp>
+        </p:grpSp>
+        <p:grpSp>
+          <p:nvGrpSpPr>
+            <p:cNvPr id="26" name="Groupe 25">
+              <a:extLst>
+                <a:ext uri="{FF2B5EF4-FFF2-40B4-BE49-F238E27FC236}">
+                  <a16:creationId xmlns:a16="http://schemas.microsoft.com/office/drawing/2014/main" id="{82A16EBD-4B4D-0E6E-5D36-6D59D976CEDE}"/>
+                </a:ext>
+              </a:extLst>
+            </p:cNvPr>
+            <p:cNvGrpSpPr/>
+            <p:nvPr/>
+          </p:nvGrpSpPr>
+          <p:grpSpPr>
+            <a:xfrm>
+              <a:off x="5161239" y="1584540"/>
+              <a:ext cx="288000" cy="288000"/>
+              <a:chOff x="4943745" y="2850212"/>
+              <a:chExt cx="288000" cy="288000"/>
+            </a:xfrm>
+          </p:grpSpPr>
+          <p:sp>
+            <p:nvSpPr>
+              <p:cNvPr id="46" name="Ellipse 45">
+                <a:extLst>
+                  <a:ext uri="{FF2B5EF4-FFF2-40B4-BE49-F238E27FC236}">
+                    <a16:creationId xmlns:a16="http://schemas.microsoft.com/office/drawing/2014/main" id="{99EB5186-C529-443C-EBF6-5C5EDC871D9C}"/>
+                  </a:ext>
+                </a:extLst>
+              </p:cNvPr>
+              <p:cNvSpPr/>
+              <p:nvPr/>
+            </p:nvSpPr>
+            <p:spPr>
+              <a:xfrm>
+                <a:off x="4943745" y="2850212"/>
+                <a:ext cx="288000" cy="288000"/>
+              </a:xfrm>
+              <a:prstGeom prst="ellipse">
+                <a:avLst/>
+              </a:prstGeom>
+              <a:solidFill>
+                <a:schemeClr val="bg1"/>
+              </a:solidFill>
+              <a:ln w="28575">
+                <a:solidFill>
+                  <a:srgbClr val="00B0F0"/>
+                </a:solidFill>
+              </a:ln>
+            </p:spPr>
+            <p:style>
+              <a:lnRef idx="2">
+                <a:schemeClr val="accent1">
+                  <a:shade val="50000"/>
+                </a:schemeClr>
+              </a:lnRef>
+              <a:fillRef idx="1">
+                <a:schemeClr val="accent1"/>
+              </a:fillRef>
+              <a:effectRef idx="0">
+                <a:schemeClr val="accent1"/>
+              </a:effectRef>
+              <a:fontRef idx="minor">
+                <a:schemeClr val="lt1"/>
+              </a:fontRef>
+            </p:style>
+            <p:txBody>
+              <a:bodyPr rtlCol="0" anchor="ctr"/>
+              <a:lstStyle/>
+              <a:p>
+                <a:pPr algn="ctr"/>
+                <a:endParaRPr lang="fr-FR" dirty="0"/>
+              </a:p>
+            </p:txBody>
+          </p:sp>
+          <p:cxnSp>
+            <p:nvCxnSpPr>
+              <p:cNvPr id="47" name="Connecteur droit 46">
+                <a:extLst>
+                  <a:ext uri="{FF2B5EF4-FFF2-40B4-BE49-F238E27FC236}">
+                    <a16:creationId xmlns:a16="http://schemas.microsoft.com/office/drawing/2014/main" id="{4BE41324-E2DD-569B-0E26-2FAAAA1F3506}"/>
+                  </a:ext>
+                </a:extLst>
+              </p:cNvPr>
+              <p:cNvCxnSpPr>
+                <a:cxnSpLocks/>
+                <a:stCxn id="46" idx="1"/>
+                <a:endCxn id="48" idx="5"/>
+              </p:cNvCxnSpPr>
+              <p:nvPr/>
+            </p:nvCxnSpPr>
+            <p:spPr>
+              <a:xfrm>
+                <a:off x="4985922" y="2892389"/>
+                <a:ext cx="165463" cy="165463"/>
+              </a:xfrm>
+              <a:prstGeom prst="line">
+                <a:avLst/>
+              </a:prstGeom>
+              <a:noFill/>
+              <a:ln w="28575">
+                <a:solidFill>
+                  <a:srgbClr val="00B0F0"/>
+                </a:solidFill>
+              </a:ln>
+            </p:spPr>
+            <p:style>
+              <a:lnRef idx="2">
+                <a:schemeClr val="accent1">
+                  <a:shade val="50000"/>
+                </a:schemeClr>
+              </a:lnRef>
+              <a:fillRef idx="1">
+                <a:schemeClr val="accent1"/>
+              </a:fillRef>
+              <a:effectRef idx="0">
+                <a:schemeClr val="accent1"/>
+              </a:effectRef>
+              <a:fontRef idx="minor">
+                <a:schemeClr val="lt1"/>
+              </a:fontRef>
+            </p:style>
+          </p:cxnSp>
+          <p:sp>
+            <p:nvSpPr>
+              <p:cNvPr id="48" name="Ellipse 47">
+                <a:extLst>
+                  <a:ext uri="{FF2B5EF4-FFF2-40B4-BE49-F238E27FC236}">
+                    <a16:creationId xmlns:a16="http://schemas.microsoft.com/office/drawing/2014/main" id="{33C155D3-CE6C-0B37-C4AE-25E73D9332CB}"/>
+                  </a:ext>
+                </a:extLst>
+              </p:cNvPr>
+              <p:cNvSpPr/>
+              <p:nvPr/>
+            </p:nvSpPr>
+            <p:spPr>
+              <a:xfrm>
+                <a:off x="4997745" y="2904212"/>
+                <a:ext cx="180000" cy="180000"/>
+              </a:xfrm>
+              <a:prstGeom prst="ellipse">
+                <a:avLst/>
+              </a:prstGeom>
+              <a:solidFill>
+                <a:schemeClr val="bg1"/>
+              </a:solidFill>
+              <a:ln w="28575">
+                <a:solidFill>
+                  <a:srgbClr val="00B0F0"/>
+                </a:solidFill>
+              </a:ln>
+            </p:spPr>
+            <p:style>
+              <a:lnRef idx="2">
+                <a:schemeClr val="accent1">
+                  <a:shade val="50000"/>
+                </a:schemeClr>
+              </a:lnRef>
+              <a:fillRef idx="1">
+                <a:schemeClr val="accent1"/>
+              </a:fillRef>
+              <a:effectRef idx="0">
+                <a:schemeClr val="accent1"/>
+              </a:effectRef>
+              <a:fontRef idx="minor">
+                <a:schemeClr val="lt1"/>
+              </a:fontRef>
+            </p:style>
+            <p:txBody>
+              <a:bodyPr rtlCol="0" anchor="ctr"/>
+              <a:lstStyle/>
+              <a:p>
+                <a:pPr algn="ctr"/>
+                <a:endParaRPr lang="fr-FR" dirty="0"/>
+              </a:p>
+            </p:txBody>
+          </p:sp>
+        </p:grpSp>
+        <p:sp>
+          <p:nvSpPr>
+            <p:cNvPr id="28" name="Ellipse 27">
+              <a:extLst>
+                <a:ext uri="{FF2B5EF4-FFF2-40B4-BE49-F238E27FC236}">
+                  <a16:creationId xmlns:a16="http://schemas.microsoft.com/office/drawing/2014/main" id="{AD932854-C1E1-F111-62B0-7436DE467683}"/>
+                </a:ext>
+              </a:extLst>
+            </p:cNvPr>
+            <p:cNvSpPr/>
+            <p:nvPr/>
+          </p:nvSpPr>
+          <p:spPr>
+            <a:xfrm>
+              <a:off x="6641998" y="1628800"/>
+              <a:ext cx="180000" cy="180000"/>
+            </a:xfrm>
+            <a:prstGeom prst="ellipse">
+              <a:avLst/>
+            </a:prstGeom>
+            <a:noFill/>
+            <a:ln w="28575">
+              <a:solidFill>
+                <a:srgbClr val="0070C0"/>
+              </a:solidFill>
+            </a:ln>
+          </p:spPr>
+          <p:style>
+            <a:lnRef idx="2">
+              <a:schemeClr val="accent1">
+                <a:shade val="50000"/>
+              </a:schemeClr>
+            </a:lnRef>
+            <a:fillRef idx="1">
+              <a:schemeClr val="accent1"/>
+            </a:fillRef>
+            <a:effectRef idx="0">
+              <a:schemeClr val="accent1"/>
+            </a:effectRef>
+            <a:fontRef idx="minor">
+              <a:schemeClr val="lt1"/>
+            </a:fontRef>
+          </p:style>
+          <p:txBody>
+            <a:bodyPr rtlCol="0" anchor="ctr"/>
+            <a:lstStyle/>
+            <a:p>
+              <a:pPr algn="ctr"/>
+              <a:endParaRPr lang="fr-FR" dirty="0"/>
+            </a:p>
+          </p:txBody>
+        </p:sp>
+        <p:grpSp>
+          <p:nvGrpSpPr>
+            <p:cNvPr id="29" name="Groupe 28">
+              <a:extLst>
+                <a:ext uri="{FF2B5EF4-FFF2-40B4-BE49-F238E27FC236}">
+                  <a16:creationId xmlns:a16="http://schemas.microsoft.com/office/drawing/2014/main" id="{D74C1A15-F10F-4B77-2577-0032087AD2E4}"/>
+                </a:ext>
+              </a:extLst>
+            </p:cNvPr>
+            <p:cNvGrpSpPr/>
+            <p:nvPr/>
+          </p:nvGrpSpPr>
+          <p:grpSpPr>
+            <a:xfrm>
+              <a:off x="5368879" y="1782440"/>
+              <a:ext cx="1307899" cy="1426013"/>
+              <a:chOff x="5368879" y="1782440"/>
+              <a:chExt cx="1307899" cy="1426013"/>
+            </a:xfrm>
+          </p:grpSpPr>
+          <p:cxnSp>
+            <p:nvCxnSpPr>
+              <p:cNvPr id="43" name="Connecteur droit 42">
+                <a:extLst>
+                  <a:ext uri="{FF2B5EF4-FFF2-40B4-BE49-F238E27FC236}">
+                    <a16:creationId xmlns:a16="http://schemas.microsoft.com/office/drawing/2014/main" id="{36D9B692-40E0-6926-5CDB-3C57A6D40F9D}"/>
+                  </a:ext>
+                </a:extLst>
+              </p:cNvPr>
+              <p:cNvCxnSpPr>
+                <a:cxnSpLocks/>
+                <a:stCxn id="27" idx="1"/>
+                <a:endCxn id="48" idx="5"/>
+              </p:cNvCxnSpPr>
+              <p:nvPr/>
+            </p:nvCxnSpPr>
+            <p:spPr>
+              <a:xfrm flipH="1" flipV="1">
+                <a:off x="5368879" y="1792180"/>
+                <a:ext cx="1307899" cy="1411172"/>
+              </a:xfrm>
+              <a:prstGeom prst="line">
+                <a:avLst/>
+              </a:prstGeom>
+              <a:noFill/>
+              <a:ln w="28575">
+                <a:solidFill>
+                  <a:srgbClr val="FFC000"/>
+                </a:solidFill>
+              </a:ln>
+            </p:spPr>
+            <p:style>
+              <a:lnRef idx="2">
+                <a:schemeClr val="accent1">
+                  <a:shade val="50000"/>
+                </a:schemeClr>
+              </a:lnRef>
+              <a:fillRef idx="1">
+                <a:schemeClr val="accent1"/>
+              </a:fillRef>
+              <a:effectRef idx="0">
+                <a:schemeClr val="accent1"/>
+              </a:effectRef>
+              <a:fontRef idx="minor">
+                <a:schemeClr val="lt1"/>
+              </a:fontRef>
+            </p:style>
+          </p:cxnSp>
+          <p:cxnSp>
+            <p:nvCxnSpPr>
+              <p:cNvPr id="44" name="Connecteur droit 43">
+                <a:extLst>
+                  <a:ext uri="{FF2B5EF4-FFF2-40B4-BE49-F238E27FC236}">
+                    <a16:creationId xmlns:a16="http://schemas.microsoft.com/office/drawing/2014/main" id="{D1D1CB42-F207-BD97-4FF8-249E1D5F3B0F}"/>
+                  </a:ext>
+                </a:extLst>
+              </p:cNvPr>
+              <p:cNvCxnSpPr>
+                <a:cxnSpLocks/>
+                <a:stCxn id="57" idx="7"/>
+                <a:endCxn id="28" idx="3"/>
+              </p:cNvCxnSpPr>
+              <p:nvPr/>
+            </p:nvCxnSpPr>
+            <p:spPr>
+              <a:xfrm flipV="1">
+                <a:off x="5368879" y="1782440"/>
+                <a:ext cx="1299479" cy="1426013"/>
+              </a:xfrm>
+              <a:prstGeom prst="line">
+                <a:avLst/>
+              </a:prstGeom>
+              <a:noFill/>
+              <a:ln w="28575">
+                <a:solidFill>
+                  <a:srgbClr val="7030A0"/>
+                </a:solidFill>
+              </a:ln>
+            </p:spPr>
+            <p:style>
+              <a:lnRef idx="2">
+                <a:schemeClr val="accent1">
+                  <a:shade val="50000"/>
+                </a:schemeClr>
+              </a:lnRef>
+              <a:fillRef idx="1">
+                <a:schemeClr val="accent1"/>
+              </a:fillRef>
+              <a:effectRef idx="0">
+                <a:schemeClr val="accent1"/>
+              </a:effectRef>
+              <a:fontRef idx="minor">
+                <a:schemeClr val="lt1"/>
+              </a:fontRef>
+            </p:style>
+          </p:cxnSp>
+          <p:sp>
+            <p:nvSpPr>
+              <p:cNvPr id="45" name="Ellipse 44">
+                <a:extLst>
+                  <a:ext uri="{FF2B5EF4-FFF2-40B4-BE49-F238E27FC236}">
+                    <a16:creationId xmlns:a16="http://schemas.microsoft.com/office/drawing/2014/main" id="{437B6D09-38A5-DF52-CFDF-2DD8EF509049}"/>
+                  </a:ext>
+                </a:extLst>
+              </p:cNvPr>
+              <p:cNvSpPr/>
+              <p:nvPr/>
+            </p:nvSpPr>
+            <p:spPr>
+              <a:xfrm>
+                <a:off x="5928618" y="2407679"/>
+                <a:ext cx="180000" cy="180000"/>
+              </a:xfrm>
+              <a:prstGeom prst="ellipse">
+                <a:avLst/>
+              </a:prstGeom>
+              <a:solidFill>
+                <a:schemeClr val="bg1"/>
+              </a:solidFill>
+              <a:ln w="28575">
+                <a:solidFill>
+                  <a:srgbClr val="7030A0"/>
+                </a:solidFill>
+              </a:ln>
+            </p:spPr>
+            <p:style>
+              <a:lnRef idx="2">
+                <a:schemeClr val="accent1">
+                  <a:shade val="50000"/>
+                </a:schemeClr>
+              </a:lnRef>
+              <a:fillRef idx="1">
+                <a:schemeClr val="accent1"/>
+              </a:fillRef>
+              <a:effectRef idx="0">
+                <a:schemeClr val="accent1"/>
+              </a:effectRef>
+              <a:fontRef idx="minor">
+                <a:schemeClr val="lt1"/>
+              </a:fontRef>
+            </p:style>
+            <p:txBody>
+              <a:bodyPr rtlCol="0" anchor="ctr"/>
+              <a:lstStyle/>
+              <a:p>
+                <a:pPr algn="ctr"/>
+                <a:endParaRPr lang="fr-FR" dirty="0"/>
+              </a:p>
+            </p:txBody>
+          </p:sp>
+        </p:grpSp>
+        <p:grpSp>
+          <p:nvGrpSpPr>
+            <p:cNvPr id="30" name="Groupe 29">
+              <a:extLst>
+                <a:ext uri="{FF2B5EF4-FFF2-40B4-BE49-F238E27FC236}">
+                  <a16:creationId xmlns:a16="http://schemas.microsoft.com/office/drawing/2014/main" id="{9710FE55-175C-8B8B-94BF-ED48A1096AA5}"/>
+                </a:ext>
+              </a:extLst>
+            </p:cNvPr>
+            <p:cNvGrpSpPr/>
+            <p:nvPr/>
+          </p:nvGrpSpPr>
+          <p:grpSpPr>
+            <a:xfrm>
+              <a:off x="6800861" y="1787380"/>
+              <a:ext cx="1307899" cy="1426013"/>
+              <a:chOff x="5368879" y="1782440"/>
+              <a:chExt cx="1307899" cy="1426013"/>
+            </a:xfrm>
+          </p:grpSpPr>
+          <p:cxnSp>
+            <p:nvCxnSpPr>
+              <p:cNvPr id="40" name="Connecteur droit 39">
+                <a:extLst>
+                  <a:ext uri="{FF2B5EF4-FFF2-40B4-BE49-F238E27FC236}">
+                    <a16:creationId xmlns:a16="http://schemas.microsoft.com/office/drawing/2014/main" id="{17830AA6-7F0A-C73F-C651-A3FBB7144278}"/>
+                  </a:ext>
+                </a:extLst>
+              </p:cNvPr>
+              <p:cNvCxnSpPr>
+                <a:cxnSpLocks/>
+              </p:cNvCxnSpPr>
+              <p:nvPr/>
+            </p:nvCxnSpPr>
+            <p:spPr>
+              <a:xfrm flipH="1" flipV="1">
+                <a:off x="5368879" y="1792180"/>
+                <a:ext cx="1307899" cy="1411172"/>
+              </a:xfrm>
+              <a:prstGeom prst="line">
+                <a:avLst/>
+              </a:prstGeom>
+              <a:noFill/>
+              <a:ln w="28575">
+                <a:solidFill>
+                  <a:srgbClr val="FFC000"/>
+                </a:solidFill>
+              </a:ln>
+            </p:spPr>
+            <p:style>
+              <a:lnRef idx="2">
+                <a:schemeClr val="accent1">
+                  <a:shade val="50000"/>
+                </a:schemeClr>
+              </a:lnRef>
+              <a:fillRef idx="1">
+                <a:schemeClr val="accent1"/>
+              </a:fillRef>
+              <a:effectRef idx="0">
+                <a:schemeClr val="accent1"/>
+              </a:effectRef>
+              <a:fontRef idx="minor">
+                <a:schemeClr val="lt1"/>
+              </a:fontRef>
+            </p:style>
+          </p:cxnSp>
+          <p:cxnSp>
+            <p:nvCxnSpPr>
+              <p:cNvPr id="41" name="Connecteur droit 40">
+                <a:extLst>
+                  <a:ext uri="{FF2B5EF4-FFF2-40B4-BE49-F238E27FC236}">
+                    <a16:creationId xmlns:a16="http://schemas.microsoft.com/office/drawing/2014/main" id="{63B43A62-EBAF-E5C5-86B1-A5A9E0B43E4E}"/>
+                  </a:ext>
+                </a:extLst>
+              </p:cNvPr>
+              <p:cNvCxnSpPr>
+                <a:cxnSpLocks/>
+              </p:cNvCxnSpPr>
+              <p:nvPr/>
+            </p:nvCxnSpPr>
+            <p:spPr>
+              <a:xfrm flipV="1">
+                <a:off x="5368879" y="1782440"/>
+                <a:ext cx="1299479" cy="1426013"/>
+              </a:xfrm>
+              <a:prstGeom prst="line">
+                <a:avLst/>
+              </a:prstGeom>
+              <a:noFill/>
+              <a:ln w="28575">
+                <a:solidFill>
+                  <a:srgbClr val="7030A0"/>
+                </a:solidFill>
+              </a:ln>
+            </p:spPr>
+            <p:style>
+              <a:lnRef idx="2">
+                <a:schemeClr val="accent1">
+                  <a:shade val="50000"/>
+                </a:schemeClr>
+              </a:lnRef>
+              <a:fillRef idx="1">
+                <a:schemeClr val="accent1"/>
+              </a:fillRef>
+              <a:effectRef idx="0">
+                <a:schemeClr val="accent1"/>
+              </a:effectRef>
+              <a:fontRef idx="minor">
+                <a:schemeClr val="lt1"/>
+              </a:fontRef>
+            </p:style>
+          </p:cxnSp>
+          <p:sp>
+            <p:nvSpPr>
+              <p:cNvPr id="42" name="Ellipse 41">
+                <a:extLst>
+                  <a:ext uri="{FF2B5EF4-FFF2-40B4-BE49-F238E27FC236}">
+                    <a16:creationId xmlns:a16="http://schemas.microsoft.com/office/drawing/2014/main" id="{62121CE7-EEDD-3F36-58F6-636305CD61B9}"/>
+                  </a:ext>
+                </a:extLst>
+              </p:cNvPr>
+              <p:cNvSpPr/>
+              <p:nvPr/>
+            </p:nvSpPr>
+            <p:spPr>
+              <a:xfrm>
+                <a:off x="5928618" y="2407679"/>
+                <a:ext cx="180000" cy="180000"/>
+              </a:xfrm>
+              <a:prstGeom prst="ellipse">
+                <a:avLst/>
+              </a:prstGeom>
+              <a:solidFill>
+                <a:schemeClr val="bg1"/>
+              </a:solidFill>
+              <a:ln w="28575">
+                <a:solidFill>
+                  <a:srgbClr val="7030A0"/>
+                </a:solidFill>
+              </a:ln>
+            </p:spPr>
+            <p:style>
+              <a:lnRef idx="2">
+                <a:schemeClr val="accent1">
+                  <a:shade val="50000"/>
+                </a:schemeClr>
+              </a:lnRef>
+              <a:fillRef idx="1">
+                <a:schemeClr val="accent1"/>
+              </a:fillRef>
+              <a:effectRef idx="0">
+                <a:schemeClr val="accent1"/>
+              </a:effectRef>
+              <a:fontRef idx="minor">
+                <a:schemeClr val="lt1"/>
+              </a:fontRef>
+            </p:style>
+            <p:txBody>
+              <a:bodyPr rtlCol="0" anchor="ctr"/>
+              <a:lstStyle/>
+              <a:p>
+                <a:pPr algn="ctr"/>
+                <a:endParaRPr lang="fr-FR" dirty="0"/>
+              </a:p>
+            </p:txBody>
+          </p:sp>
+        </p:grpSp>
+        <p:sp>
+          <p:nvSpPr>
+            <p:cNvPr id="31" name="Ellipse 30">
+              <a:extLst>
+                <a:ext uri="{FF2B5EF4-FFF2-40B4-BE49-F238E27FC236}">
+                  <a16:creationId xmlns:a16="http://schemas.microsoft.com/office/drawing/2014/main" id="{CEADD284-4F0C-93A6-8199-C06C1748DEEE}"/>
+                </a:ext>
+              </a:extLst>
+            </p:cNvPr>
+            <p:cNvSpPr/>
+            <p:nvPr/>
+          </p:nvSpPr>
+          <p:spPr>
+            <a:xfrm>
+              <a:off x="5489116" y="2166327"/>
+              <a:ext cx="180000" cy="180000"/>
+            </a:xfrm>
+            <a:prstGeom prst="ellipse">
+              <a:avLst/>
+            </a:prstGeom>
+            <a:solidFill>
+              <a:schemeClr val="bg1"/>
+            </a:solidFill>
+            <a:ln w="19050">
+              <a:solidFill>
+                <a:srgbClr val="FFC000"/>
+              </a:solidFill>
+            </a:ln>
+          </p:spPr>
+          <p:style>
+            <a:lnRef idx="2">
+              <a:schemeClr val="accent1">
+                <a:shade val="50000"/>
+              </a:schemeClr>
+            </a:lnRef>
+            <a:fillRef idx="1">
+              <a:schemeClr val="accent1"/>
+            </a:fillRef>
+            <a:effectRef idx="0">
+              <a:schemeClr val="accent1"/>
+            </a:effectRef>
+            <a:fontRef idx="minor">
+              <a:schemeClr val="lt1"/>
+            </a:fontRef>
+          </p:style>
+          <p:txBody>
+            <a:bodyPr rtlCol="0" anchor="ctr"/>
+            <a:lstStyle/>
+            <a:p>
+              <a:pPr algn="ctr"/>
+              <a:r>
+                <a:rPr lang="fr-FR" sz="1050" b="1" dirty="0">
+                  <a:solidFill>
+                    <a:srgbClr val="FFC000"/>
+                  </a:solidFill>
+                </a:rPr>
+                <a:t>a</a:t>
+              </a:r>
+              <a:endParaRPr lang="fr-FR" sz="1400" b="1" dirty="0">
+                <a:solidFill>
+                  <a:srgbClr val="FFC000"/>
+                </a:solidFill>
+              </a:endParaRPr>
+            </a:p>
+          </p:txBody>
+        </p:sp>
+        <p:sp>
+          <p:nvSpPr>
+            <p:cNvPr id="32" name="Ellipse 31">
+              <a:extLst>
+                <a:ext uri="{FF2B5EF4-FFF2-40B4-BE49-F238E27FC236}">
+                  <a16:creationId xmlns:a16="http://schemas.microsoft.com/office/drawing/2014/main" id="{78B0647C-6910-209F-1A1D-5749950800F1}"/>
+                </a:ext>
+              </a:extLst>
+            </p:cNvPr>
+            <p:cNvSpPr/>
+            <p:nvPr/>
+          </p:nvSpPr>
+          <p:spPr>
+            <a:xfrm>
+              <a:off x="5492679" y="2676859"/>
+              <a:ext cx="180000" cy="180000"/>
+            </a:xfrm>
+            <a:prstGeom prst="ellipse">
+              <a:avLst/>
+            </a:prstGeom>
+            <a:solidFill>
+              <a:schemeClr val="bg1"/>
+            </a:solidFill>
+            <a:ln w="19050">
+              <a:solidFill>
+                <a:srgbClr val="7030A0"/>
+              </a:solidFill>
+            </a:ln>
+          </p:spPr>
+          <p:style>
+            <a:lnRef idx="2">
+              <a:schemeClr val="accent1">
+                <a:shade val="50000"/>
+              </a:schemeClr>
+            </a:lnRef>
+            <a:fillRef idx="1">
+              <a:schemeClr val="accent1"/>
+            </a:fillRef>
+            <a:effectRef idx="0">
+              <a:schemeClr val="accent1"/>
+            </a:effectRef>
+            <a:fontRef idx="minor">
+              <a:schemeClr val="lt1"/>
+            </a:fontRef>
+          </p:style>
+          <p:txBody>
+            <a:bodyPr rtlCol="0" anchor="ctr"/>
+            <a:lstStyle/>
+            <a:p>
+              <a:pPr algn="ctr"/>
+              <a:r>
+                <a:rPr lang="fr-FR" sz="1050" b="1" dirty="0">
+                  <a:solidFill>
+                    <a:srgbClr val="7030A0"/>
+                  </a:solidFill>
+                </a:rPr>
+                <a:t>b</a:t>
+              </a:r>
+              <a:endParaRPr lang="fr-FR" sz="1400" b="1" dirty="0">
+                <a:solidFill>
+                  <a:srgbClr val="7030A0"/>
+                </a:solidFill>
+              </a:endParaRPr>
+            </a:p>
+          </p:txBody>
+        </p:sp>
+        <p:sp>
+          <p:nvSpPr>
+            <p:cNvPr id="33" name="Ellipse 32">
+              <a:extLst>
+                <a:ext uri="{FF2B5EF4-FFF2-40B4-BE49-F238E27FC236}">
+                  <a16:creationId xmlns:a16="http://schemas.microsoft.com/office/drawing/2014/main" id="{57B174BF-CA15-EDB8-2A5B-5643253B6981}"/>
+                </a:ext>
+              </a:extLst>
+            </p:cNvPr>
+            <p:cNvSpPr/>
+            <p:nvPr/>
+          </p:nvSpPr>
+          <p:spPr>
+            <a:xfrm>
+              <a:off x="7806536" y="2676859"/>
+              <a:ext cx="180000" cy="180000"/>
+            </a:xfrm>
+            <a:prstGeom prst="ellipse">
+              <a:avLst/>
+            </a:prstGeom>
+            <a:solidFill>
+              <a:schemeClr val="bg1"/>
+            </a:solidFill>
+            <a:ln w="19050">
+              <a:solidFill>
+                <a:srgbClr val="FFC000"/>
+              </a:solidFill>
+            </a:ln>
+          </p:spPr>
+          <p:style>
+            <a:lnRef idx="2">
+              <a:schemeClr val="accent1">
+                <a:shade val="50000"/>
+              </a:schemeClr>
+            </a:lnRef>
+            <a:fillRef idx="1">
+              <a:schemeClr val="accent1"/>
+            </a:fillRef>
+            <a:effectRef idx="0">
+              <a:schemeClr val="accent1"/>
+            </a:effectRef>
+            <a:fontRef idx="minor">
+              <a:schemeClr val="lt1"/>
+            </a:fontRef>
+          </p:style>
+          <p:txBody>
+            <a:bodyPr rtlCol="0" anchor="ctr"/>
+            <a:lstStyle/>
+            <a:p>
+              <a:pPr algn="ctr"/>
+              <a:r>
+                <a:rPr lang="fr-FR" sz="1050" b="1" dirty="0">
+                  <a:solidFill>
+                    <a:srgbClr val="FFC000"/>
+                  </a:solidFill>
+                </a:rPr>
+                <a:t>c</a:t>
+              </a:r>
+              <a:endParaRPr lang="fr-FR" sz="1400" b="1" dirty="0">
+                <a:solidFill>
+                  <a:srgbClr val="FFC000"/>
+                </a:solidFill>
+              </a:endParaRPr>
+            </a:p>
+          </p:txBody>
+        </p:sp>
+        <p:sp>
+          <p:nvSpPr>
+            <p:cNvPr id="34" name="Ellipse 33">
+              <a:extLst>
+                <a:ext uri="{FF2B5EF4-FFF2-40B4-BE49-F238E27FC236}">
+                  <a16:creationId xmlns:a16="http://schemas.microsoft.com/office/drawing/2014/main" id="{96C75027-1207-EC10-C9B4-ECB80B6B3ED7}"/>
+                </a:ext>
+              </a:extLst>
+            </p:cNvPr>
+            <p:cNvSpPr/>
+            <p:nvPr/>
+          </p:nvSpPr>
+          <p:spPr>
+            <a:xfrm>
+              <a:off x="7806536" y="2166327"/>
+              <a:ext cx="180000" cy="180000"/>
+            </a:xfrm>
+            <a:prstGeom prst="ellipse">
+              <a:avLst/>
+            </a:prstGeom>
+            <a:solidFill>
+              <a:schemeClr val="bg1"/>
+            </a:solidFill>
+            <a:ln w="19050">
+              <a:solidFill>
+                <a:srgbClr val="7030A0"/>
+              </a:solidFill>
+            </a:ln>
+          </p:spPr>
+          <p:style>
+            <a:lnRef idx="2">
+              <a:schemeClr val="accent1">
+                <a:shade val="50000"/>
+              </a:schemeClr>
+            </a:lnRef>
+            <a:fillRef idx="1">
+              <a:schemeClr val="accent1"/>
+            </a:fillRef>
+            <a:effectRef idx="0">
+              <a:schemeClr val="accent1"/>
+            </a:effectRef>
+            <a:fontRef idx="minor">
+              <a:schemeClr val="lt1"/>
+            </a:fontRef>
+          </p:style>
+          <p:txBody>
+            <a:bodyPr rtlCol="0" anchor="ctr"/>
+            <a:lstStyle/>
+            <a:p>
+              <a:pPr algn="ctr"/>
+              <a:r>
+                <a:rPr lang="fr-FR" sz="1050" b="1" dirty="0">
+                  <a:solidFill>
+                    <a:srgbClr val="7030A0"/>
+                  </a:solidFill>
+                </a:rPr>
+                <a:t>d</a:t>
+              </a:r>
+              <a:endParaRPr lang="fr-FR" sz="1400" b="1" dirty="0">
+                <a:solidFill>
+                  <a:srgbClr val="7030A0"/>
+                </a:solidFill>
+              </a:endParaRPr>
+            </a:p>
+          </p:txBody>
+        </p:sp>
+        <p:sp>
+          <p:nvSpPr>
+            <p:cNvPr id="35" name="Ellipse 34">
+              <a:extLst>
+                <a:ext uri="{FF2B5EF4-FFF2-40B4-BE49-F238E27FC236}">
+                  <a16:creationId xmlns:a16="http://schemas.microsoft.com/office/drawing/2014/main" id="{F9ED1067-AB04-B6FC-4DC1-160940318271}"/>
+                </a:ext>
+              </a:extLst>
+            </p:cNvPr>
+            <p:cNvSpPr/>
+            <p:nvPr/>
+          </p:nvSpPr>
+          <p:spPr>
+            <a:xfrm>
+              <a:off x="4918239" y="3170270"/>
+              <a:ext cx="180000" cy="180000"/>
+            </a:xfrm>
+            <a:prstGeom prst="ellipse">
+              <a:avLst/>
+            </a:prstGeom>
+            <a:solidFill>
+              <a:schemeClr val="bg1"/>
+            </a:solidFill>
+            <a:ln w="19050">
+              <a:solidFill>
+                <a:srgbClr val="00B0F0"/>
+              </a:solidFill>
+            </a:ln>
+          </p:spPr>
+          <p:style>
+            <a:lnRef idx="2">
+              <a:schemeClr val="accent1">
+                <a:shade val="50000"/>
+              </a:schemeClr>
+            </a:lnRef>
+            <a:fillRef idx="1">
+              <a:schemeClr val="accent1"/>
+            </a:fillRef>
+            <a:effectRef idx="0">
+              <a:schemeClr val="accent1"/>
+            </a:effectRef>
+            <a:fontRef idx="minor">
+              <a:schemeClr val="lt1"/>
+            </a:fontRef>
+          </p:style>
+          <p:txBody>
+            <a:bodyPr rtlCol="0" anchor="ctr"/>
+            <a:lstStyle/>
+            <a:p>
+              <a:pPr algn="ctr"/>
+              <a:r>
+                <a:rPr lang="fr-FR" sz="1050" b="1" dirty="0">
+                  <a:solidFill>
+                    <a:srgbClr val="00B0F0"/>
+                  </a:solidFill>
+                </a:rPr>
+                <a:t>e</a:t>
+              </a:r>
+              <a:endParaRPr lang="fr-FR" sz="1400" b="1" dirty="0">
+                <a:solidFill>
+                  <a:srgbClr val="00B0F0"/>
+                </a:solidFill>
+              </a:endParaRPr>
+            </a:p>
+          </p:txBody>
+        </p:sp>
+        <p:sp>
+          <p:nvSpPr>
+            <p:cNvPr id="36" name="Ellipse 35">
+              <a:extLst>
+                <a:ext uri="{FF2B5EF4-FFF2-40B4-BE49-F238E27FC236}">
+                  <a16:creationId xmlns:a16="http://schemas.microsoft.com/office/drawing/2014/main" id="{E50A3986-26C5-02BA-3744-B267B10EA982}"/>
+                </a:ext>
+              </a:extLst>
+            </p:cNvPr>
+            <p:cNvSpPr/>
+            <p:nvPr/>
+          </p:nvSpPr>
+          <p:spPr>
+            <a:xfrm>
+              <a:off x="7794400" y="3176299"/>
+              <a:ext cx="180000" cy="180000"/>
+            </a:xfrm>
+            <a:prstGeom prst="ellipse">
+              <a:avLst/>
+            </a:prstGeom>
+            <a:solidFill>
+              <a:schemeClr val="bg1"/>
+            </a:solidFill>
+            <a:ln w="19050">
+              <a:solidFill>
+                <a:srgbClr val="00B0F0"/>
+              </a:solidFill>
+            </a:ln>
+          </p:spPr>
+          <p:style>
+            <a:lnRef idx="2">
+              <a:schemeClr val="accent1">
+                <a:shade val="50000"/>
+              </a:schemeClr>
+            </a:lnRef>
+            <a:fillRef idx="1">
+              <a:schemeClr val="accent1"/>
+            </a:fillRef>
+            <a:effectRef idx="0">
+              <a:schemeClr val="accent1"/>
+            </a:effectRef>
+            <a:fontRef idx="minor">
+              <a:schemeClr val="lt1"/>
+            </a:fontRef>
+          </p:style>
+          <p:txBody>
+            <a:bodyPr rtlCol="0" anchor="ctr"/>
+            <a:lstStyle/>
+            <a:p>
+              <a:pPr algn="ctr"/>
+              <a:r>
+                <a:rPr lang="fr-FR" sz="1050" b="1" dirty="0">
+                  <a:solidFill>
+                    <a:srgbClr val="00B0F0"/>
+                  </a:solidFill>
+                </a:rPr>
+                <a:t>f</a:t>
+              </a:r>
+              <a:endParaRPr lang="fr-FR" sz="1400" b="1" dirty="0">
+                <a:solidFill>
+                  <a:srgbClr val="00B0F0"/>
+                </a:solidFill>
+              </a:endParaRPr>
+            </a:p>
+          </p:txBody>
+        </p:sp>
+        <p:sp>
+          <p:nvSpPr>
+            <p:cNvPr id="37" name="Ellipse 36">
+              <a:extLst>
+                <a:ext uri="{FF2B5EF4-FFF2-40B4-BE49-F238E27FC236}">
+                  <a16:creationId xmlns:a16="http://schemas.microsoft.com/office/drawing/2014/main" id="{1BAF0B4E-4597-CE5A-D4E4-752117D79302}"/>
+                </a:ext>
+              </a:extLst>
+            </p:cNvPr>
+            <p:cNvSpPr/>
+            <p:nvPr/>
+          </p:nvSpPr>
+          <p:spPr>
+            <a:xfrm>
+              <a:off x="4931419" y="1630522"/>
+              <a:ext cx="180000" cy="180000"/>
+            </a:xfrm>
+            <a:prstGeom prst="ellipse">
+              <a:avLst/>
+            </a:prstGeom>
+            <a:solidFill>
+              <a:schemeClr val="bg1"/>
+            </a:solidFill>
+            <a:ln w="19050">
+              <a:solidFill>
+                <a:srgbClr val="00B0F0"/>
+              </a:solidFill>
+            </a:ln>
+          </p:spPr>
+          <p:style>
+            <a:lnRef idx="2">
+              <a:schemeClr val="accent1">
+                <a:shade val="50000"/>
+              </a:schemeClr>
+            </a:lnRef>
+            <a:fillRef idx="1">
+              <a:schemeClr val="accent1"/>
+            </a:fillRef>
+            <a:effectRef idx="0">
+              <a:schemeClr val="accent1"/>
+            </a:effectRef>
+            <a:fontRef idx="minor">
+              <a:schemeClr val="lt1"/>
+            </a:fontRef>
+          </p:style>
+          <p:txBody>
+            <a:bodyPr rtlCol="0" anchor="ctr"/>
+            <a:lstStyle/>
+            <a:p>
+              <a:pPr algn="ctr"/>
+              <a:r>
+                <a:rPr lang="fr-FR" sz="1050" b="1" dirty="0">
+                  <a:solidFill>
+                    <a:srgbClr val="00B0F0"/>
+                  </a:solidFill>
+                </a:rPr>
+                <a:t>g</a:t>
+              </a:r>
+              <a:endParaRPr lang="fr-FR" sz="1400" b="1" dirty="0">
+                <a:solidFill>
+                  <a:srgbClr val="00B0F0"/>
+                </a:solidFill>
+              </a:endParaRPr>
+            </a:p>
+          </p:txBody>
+        </p:sp>
+        <p:sp>
+          <p:nvSpPr>
+            <p:cNvPr id="38" name="Ellipse 37">
+              <a:extLst>
+                <a:ext uri="{FF2B5EF4-FFF2-40B4-BE49-F238E27FC236}">
+                  <a16:creationId xmlns:a16="http://schemas.microsoft.com/office/drawing/2014/main" id="{234C83F8-EDA4-D3B9-E71C-52E9742482AE}"/>
+                </a:ext>
+              </a:extLst>
+            </p:cNvPr>
+            <p:cNvSpPr/>
+            <p:nvPr/>
+          </p:nvSpPr>
+          <p:spPr>
+            <a:xfrm>
+              <a:off x="4931419" y="1628800"/>
+              <a:ext cx="180000" cy="180000"/>
+            </a:xfrm>
+            <a:prstGeom prst="ellipse">
+              <a:avLst/>
+            </a:prstGeom>
+            <a:solidFill>
+              <a:schemeClr val="bg1"/>
+            </a:solidFill>
+            <a:ln w="19050">
+              <a:solidFill>
+                <a:srgbClr val="00B0F0"/>
+              </a:solidFill>
+            </a:ln>
+          </p:spPr>
+          <p:style>
+            <a:lnRef idx="2">
+              <a:schemeClr val="accent1">
+                <a:shade val="50000"/>
+              </a:schemeClr>
+            </a:lnRef>
+            <a:fillRef idx="1">
+              <a:schemeClr val="accent1"/>
+            </a:fillRef>
+            <a:effectRef idx="0">
+              <a:schemeClr val="accent1"/>
+            </a:effectRef>
+            <a:fontRef idx="minor">
+              <a:schemeClr val="lt1"/>
+            </a:fontRef>
+          </p:style>
+          <p:txBody>
+            <a:bodyPr rtlCol="0" anchor="ctr"/>
+            <a:lstStyle/>
+            <a:p>
+              <a:pPr algn="ctr"/>
+              <a:r>
+                <a:rPr lang="fr-FR" sz="1050" b="1" dirty="0">
+                  <a:solidFill>
+                    <a:srgbClr val="00B0F0"/>
+                  </a:solidFill>
+                </a:rPr>
+                <a:t>g</a:t>
+              </a:r>
+              <a:endParaRPr lang="fr-FR" sz="1400" b="1" dirty="0">
+                <a:solidFill>
+                  <a:srgbClr val="00B0F0"/>
+                </a:solidFill>
+              </a:endParaRPr>
+            </a:p>
+          </p:txBody>
+        </p:sp>
+        <p:sp>
+          <p:nvSpPr>
+            <p:cNvPr id="39" name="Ellipse 38">
+              <a:extLst>
+                <a:ext uri="{FF2B5EF4-FFF2-40B4-BE49-F238E27FC236}">
+                  <a16:creationId xmlns:a16="http://schemas.microsoft.com/office/drawing/2014/main" id="{A92028BF-13C6-EE2C-E90A-5F07C28803ED}"/>
+                </a:ext>
+              </a:extLst>
+            </p:cNvPr>
+            <p:cNvSpPr/>
+            <p:nvPr/>
+          </p:nvSpPr>
+          <p:spPr>
+            <a:xfrm>
+              <a:off x="7781380" y="1636964"/>
+              <a:ext cx="180000" cy="180000"/>
+            </a:xfrm>
+            <a:prstGeom prst="ellipse">
+              <a:avLst/>
+            </a:prstGeom>
+            <a:solidFill>
+              <a:schemeClr val="bg1"/>
+            </a:solidFill>
+            <a:ln w="19050">
+              <a:solidFill>
+                <a:srgbClr val="00B0F0"/>
+              </a:solidFill>
+            </a:ln>
+          </p:spPr>
+          <p:style>
+            <a:lnRef idx="2">
+              <a:schemeClr val="accent1">
+                <a:shade val="50000"/>
+              </a:schemeClr>
+            </a:lnRef>
+            <a:fillRef idx="1">
+              <a:schemeClr val="accent1"/>
+            </a:fillRef>
+            <a:effectRef idx="0">
+              <a:schemeClr val="accent1"/>
+            </a:effectRef>
+            <a:fontRef idx="minor">
+              <a:schemeClr val="lt1"/>
+            </a:fontRef>
+          </p:style>
+          <p:txBody>
+            <a:bodyPr rtlCol="0" anchor="ctr"/>
+            <a:lstStyle/>
+            <a:p>
+              <a:pPr algn="ctr"/>
+              <a:r>
+                <a:rPr lang="fr-FR" sz="1050" b="1" dirty="0">
+                  <a:solidFill>
+                    <a:srgbClr val="00B0F0"/>
+                  </a:solidFill>
+                </a:rPr>
+                <a:t>h</a:t>
+              </a:r>
+              <a:endParaRPr lang="fr-FR" sz="1400" b="1" dirty="0">
+                <a:solidFill>
+                  <a:srgbClr val="00B0F0"/>
+                </a:solidFill>
+              </a:endParaRPr>
+            </a:p>
+          </p:txBody>
+        </p:sp>
+        <p:sp>
+          <p:nvSpPr>
+            <p:cNvPr id="27" name="Ellipse 26">
+              <a:extLst>
+                <a:ext uri="{FF2B5EF4-FFF2-40B4-BE49-F238E27FC236}">
+                  <a16:creationId xmlns:a16="http://schemas.microsoft.com/office/drawing/2014/main" id="{592B1BA6-B611-6CA8-6F69-51174B9D1464}"/>
+                </a:ext>
+              </a:extLst>
+            </p:cNvPr>
+            <p:cNvSpPr/>
+            <p:nvPr/>
+          </p:nvSpPr>
+          <p:spPr>
+            <a:xfrm>
+              <a:off x="6650418" y="3176992"/>
+              <a:ext cx="180000" cy="180000"/>
+            </a:xfrm>
+            <a:prstGeom prst="ellipse">
+              <a:avLst/>
+            </a:prstGeom>
+            <a:solidFill>
+              <a:schemeClr val="bg1"/>
+            </a:solidFill>
+            <a:ln w="28575">
+              <a:solidFill>
+                <a:srgbClr val="C00000"/>
+              </a:solidFill>
+            </a:ln>
+          </p:spPr>
+          <p:style>
+            <a:lnRef idx="2">
+              <a:schemeClr val="accent1">
+                <a:shade val="50000"/>
+              </a:schemeClr>
+            </a:lnRef>
+            <a:fillRef idx="1">
+              <a:schemeClr val="accent1"/>
+            </a:fillRef>
+            <a:effectRef idx="0">
+              <a:schemeClr val="accent1"/>
+            </a:effectRef>
+            <a:fontRef idx="minor">
+              <a:schemeClr val="lt1"/>
+            </a:fontRef>
+          </p:style>
+          <p:txBody>
+            <a:bodyPr rtlCol="0" anchor="ctr"/>
+            <a:lstStyle/>
+            <a:p>
+              <a:pPr algn="ctr"/>
+              <a:endParaRPr lang="fr-FR" dirty="0"/>
+            </a:p>
+          </p:txBody>
+        </p:sp>
+      </p:grpSp>
+      <mc:AlternateContent xmlns:mc="http://schemas.openxmlformats.org/markup-compatibility/2006" xmlns:a14="http://schemas.microsoft.com/office/drawing/2010/main">
+        <mc:Choice Requires="a14">
+          <p:sp>
+            <p:nvSpPr>
+              <p:cNvPr id="65" name="ZoneTexte 64">
+                <a:extLst>
+                  <a:ext uri="{FF2B5EF4-FFF2-40B4-BE49-F238E27FC236}">
+                    <a16:creationId xmlns:a16="http://schemas.microsoft.com/office/drawing/2014/main" id="{16D6C12B-F895-4967-B16D-35C6117BCB0B}"/>
+                  </a:ext>
+                </a:extLst>
+              </p:cNvPr>
+              <p:cNvSpPr txBox="1"/>
+              <p:nvPr/>
+            </p:nvSpPr>
+            <p:spPr>
+              <a:xfrm>
+                <a:off x="10075748" y="2333026"/>
+                <a:ext cx="169918" cy="215444"/>
+              </a:xfrm>
+              <a:prstGeom prst="rect">
+                <a:avLst/>
+              </a:prstGeom>
+              <a:noFill/>
+            </p:spPr>
+            <p:txBody>
+              <a:bodyPr wrap="none" lIns="0" tIns="0" rIns="0" bIns="0" rtlCol="0">
+                <a:spAutoFit/>
+              </a:bodyPr>
+              <a:lstStyle/>
+              <a:p>
+                <a:pPr/>
+                <a14:m>
+                  <m:oMathPara xmlns:m="http://schemas.openxmlformats.org/officeDocument/2006/math">
+                    <m:oMathParaPr>
+                      <m:jc m:val="centerGroup"/>
+                    </m:oMathParaPr>
+                    <m:oMath xmlns:m="http://schemas.openxmlformats.org/officeDocument/2006/math">
+                      <m:r>
+                        <a:rPr lang="fr-FR" sz="1400" b="1" i="1" smtClean="0">
+                          <a:latin typeface="Cambria Math" panose="02040503050406030204" pitchFamily="18" charset="0"/>
+                        </a:rPr>
+                        <m:t>𝑩</m:t>
+                      </m:r>
+                    </m:oMath>
+                  </m:oMathPara>
+                </a14:m>
+                <a:endParaRPr lang="fr-FR" sz="1400" b="1" dirty="0"/>
+              </a:p>
+            </p:txBody>
+          </p:sp>
+        </mc:Choice>
+        <mc:Fallback xmlns="">
+          <p:sp>
+            <p:nvSpPr>
+              <p:cNvPr id="65" name="ZoneTexte 64">
+                <a:extLst>
+                  <a:ext uri="{FF2B5EF4-FFF2-40B4-BE49-F238E27FC236}">
+                    <a16:creationId xmlns:a16="http://schemas.microsoft.com/office/drawing/2014/main" id="{9BC83B15-A824-895B-CC45-1193FA277D60}"/>
+                  </a:ext>
+                </a:extLst>
+              </p:cNvPr>
+              <p:cNvSpPr txBox="1">
+                <a:spLocks noRot="1" noChangeAspect="1" noMove="1" noResize="1" noEditPoints="1" noAdjustHandles="1" noChangeArrowheads="1" noChangeShapeType="1" noTextEdit="1"/>
+              </p:cNvSpPr>
+              <p:nvPr/>
+            </p:nvSpPr>
+            <p:spPr>
+              <a:xfrm>
+                <a:off x="10075748" y="2333026"/>
+                <a:ext cx="169918" cy="215444"/>
+              </a:xfrm>
+              <a:prstGeom prst="rect">
+                <a:avLst/>
+              </a:prstGeom>
+              <a:blipFill>
+                <a:blip r:embed="rId3"/>
+                <a:stretch>
+                  <a:fillRect l="-25000" r="-21429" b="-5714"/>
+                </a:stretch>
+              </a:blipFill>
+            </p:spPr>
+            <p:txBody>
+              <a:bodyPr/>
+              <a:lstStyle/>
+              <a:p>
+                <a:r>
+                  <a:rPr lang="fr-FR">
+                    <a:noFill/>
+                  </a:rPr>
+                  <a:t> </a:t>
+                </a:r>
+              </a:p>
+            </p:txBody>
+          </p:sp>
+        </mc:Fallback>
+      </mc:AlternateContent>
+      <mc:AlternateContent xmlns:mc="http://schemas.openxmlformats.org/markup-compatibility/2006" xmlns:a14="http://schemas.microsoft.com/office/drawing/2010/main">
+        <mc:Choice Requires="a14">
+          <p:sp>
+            <p:nvSpPr>
+              <p:cNvPr id="67" name="ZoneTexte 66">
+                <a:extLst>
+                  <a:ext uri="{FF2B5EF4-FFF2-40B4-BE49-F238E27FC236}">
+                    <a16:creationId xmlns:a16="http://schemas.microsoft.com/office/drawing/2014/main" id="{BA50D76B-E56E-CF72-7319-8BCBD3F33667}"/>
+                  </a:ext>
+                </a:extLst>
+              </p:cNvPr>
+              <p:cNvSpPr txBox="1"/>
+              <p:nvPr/>
+            </p:nvSpPr>
+            <p:spPr>
+              <a:xfrm>
+                <a:off x="9617135" y="1303690"/>
+                <a:ext cx="152285" cy="215444"/>
+              </a:xfrm>
+              <a:prstGeom prst="rect">
+                <a:avLst/>
+              </a:prstGeom>
+              <a:noFill/>
+            </p:spPr>
+            <p:txBody>
+              <a:bodyPr wrap="none" lIns="0" tIns="0" rIns="0" bIns="0" rtlCol="0">
+                <a:spAutoFit/>
+              </a:bodyPr>
+              <a:lstStyle/>
+              <a:p>
+                <a:pPr/>
+                <a14:m>
+                  <m:oMathPara xmlns:m="http://schemas.openxmlformats.org/officeDocument/2006/math">
+                    <m:oMathParaPr>
+                      <m:jc m:val="centerGroup"/>
+                    </m:oMathParaPr>
+                    <m:oMath xmlns:m="http://schemas.openxmlformats.org/officeDocument/2006/math">
+                      <m:r>
+                        <a:rPr lang="fr-FR" sz="1400" b="1" i="1" smtClean="0">
+                          <a:latin typeface="Cambria Math" panose="02040503050406030204" pitchFamily="18" charset="0"/>
+                        </a:rPr>
+                        <m:t>𝑪</m:t>
+                      </m:r>
+                    </m:oMath>
+                  </m:oMathPara>
+                </a14:m>
+                <a:endParaRPr lang="fr-FR" sz="1400" b="1" dirty="0"/>
+              </a:p>
+            </p:txBody>
+          </p:sp>
+        </mc:Choice>
+        <mc:Fallback xmlns="">
+          <p:sp>
+            <p:nvSpPr>
+              <p:cNvPr id="67" name="ZoneTexte 66">
+                <a:extLst>
+                  <a:ext uri="{FF2B5EF4-FFF2-40B4-BE49-F238E27FC236}">
+                    <a16:creationId xmlns:a16="http://schemas.microsoft.com/office/drawing/2014/main" id="{94B52802-AA5D-1570-B3BC-5B9F7B5C688A}"/>
+                  </a:ext>
+                </a:extLst>
+              </p:cNvPr>
+              <p:cNvSpPr txBox="1">
+                <a:spLocks noRot="1" noChangeAspect="1" noMove="1" noResize="1" noEditPoints="1" noAdjustHandles="1" noChangeArrowheads="1" noChangeShapeType="1" noTextEdit="1"/>
+              </p:cNvSpPr>
+              <p:nvPr/>
+            </p:nvSpPr>
+            <p:spPr>
+              <a:xfrm>
+                <a:off x="9617135" y="1303690"/>
+                <a:ext cx="152285" cy="215444"/>
+              </a:xfrm>
+              <a:prstGeom prst="rect">
+                <a:avLst/>
+              </a:prstGeom>
+              <a:blipFill>
+                <a:blip r:embed="rId4"/>
+                <a:stretch>
+                  <a:fillRect l="-28000" r="-24000" b="-5714"/>
+                </a:stretch>
+              </a:blipFill>
+            </p:spPr>
+            <p:txBody>
+              <a:bodyPr/>
+              <a:lstStyle/>
+              <a:p>
+                <a:r>
+                  <a:rPr lang="fr-FR">
+                    <a:noFill/>
+                  </a:rPr>
+                  <a:t> </a:t>
+                </a:r>
+              </a:p>
+            </p:txBody>
+          </p:sp>
+        </mc:Fallback>
+      </mc:AlternateContent>
+      <p:cxnSp>
+        <p:nvCxnSpPr>
+          <p:cNvPr id="66" name="Connecteur droit avec flèche 65">
+            <a:extLst>
+              <a:ext uri="{FF2B5EF4-FFF2-40B4-BE49-F238E27FC236}">
+                <a16:creationId xmlns:a16="http://schemas.microsoft.com/office/drawing/2014/main" id="{A0637D35-3451-914A-C842-ED930E65DF57}"/>
+              </a:ext>
+            </a:extLst>
+          </p:cNvPr>
+          <p:cNvCxnSpPr>
+            <a:cxnSpLocks/>
+          </p:cNvCxnSpPr>
+          <p:nvPr/>
+        </p:nvCxnSpPr>
+        <p:spPr>
+          <a:xfrm>
+            <a:off x="8539402" y="3008080"/>
+            <a:ext cx="2328935" cy="0"/>
+          </a:xfrm>
+          <a:prstGeom prst="straightConnector1">
+            <a:avLst/>
+          </a:prstGeom>
+          <a:ln w="57150">
+            <a:solidFill>
+              <a:schemeClr val="accent1">
+                <a:lumMod val="50000"/>
+              </a:schemeClr>
+            </a:solidFill>
+            <a:headEnd type="oval" w="med" len="med"/>
+            <a:tailEnd type="oval" w="med" len="med"/>
+          </a:ln>
+        </p:spPr>
+        <p:style>
+          <a:lnRef idx="1">
+            <a:schemeClr val="accent1"/>
+          </a:lnRef>
+          <a:fillRef idx="0">
+            <a:schemeClr val="accent1"/>
+          </a:fillRef>
+          <a:effectRef idx="0">
+            <a:schemeClr val="accent1"/>
+          </a:effectRef>
+          <a:fontRef idx="minor">
+            <a:schemeClr val="tx1"/>
+          </a:fontRef>
+        </p:style>
+      </p:cxnSp>
+      <p:cxnSp>
+        <p:nvCxnSpPr>
+          <p:cNvPr id="70" name="Connecteur droit avec flèche 69">
+            <a:extLst>
+              <a:ext uri="{FF2B5EF4-FFF2-40B4-BE49-F238E27FC236}">
+                <a16:creationId xmlns:a16="http://schemas.microsoft.com/office/drawing/2014/main" id="{E938F902-96A6-EC13-CDDA-66BD03DE943E}"/>
+              </a:ext>
+            </a:extLst>
+          </p:cNvPr>
+          <p:cNvCxnSpPr>
+            <a:cxnSpLocks/>
+          </p:cNvCxnSpPr>
+          <p:nvPr/>
+        </p:nvCxnSpPr>
+        <p:spPr>
+          <a:xfrm>
+            <a:off x="8484111" y="3813097"/>
+            <a:ext cx="2328935" cy="0"/>
+          </a:xfrm>
+          <a:prstGeom prst="straightConnector1">
+            <a:avLst/>
+          </a:prstGeom>
+          <a:ln w="57150">
+            <a:solidFill>
+              <a:schemeClr val="accent1">
+                <a:lumMod val="50000"/>
+              </a:schemeClr>
+            </a:solidFill>
+            <a:headEnd type="stealth" w="med" len="lg"/>
+            <a:tailEnd type="stealth" w="med" len="lg"/>
+          </a:ln>
+        </p:spPr>
+        <p:style>
+          <a:lnRef idx="1">
+            <a:schemeClr val="accent1"/>
+          </a:lnRef>
+          <a:fillRef idx="0">
+            <a:schemeClr val="accent1"/>
+          </a:fillRef>
+          <a:effectRef idx="0">
+            <a:schemeClr val="accent1"/>
+          </a:effectRef>
+          <a:fontRef idx="minor">
+            <a:schemeClr val="tx1"/>
+          </a:fontRef>
+        </p:style>
+      </p:cxnSp>
+      <mc:AlternateContent xmlns:mc="http://schemas.openxmlformats.org/markup-compatibility/2006" xmlns:a14="http://schemas.microsoft.com/office/drawing/2010/main">
+        <mc:Choice Requires="a14">
+          <p:sp>
+            <p:nvSpPr>
+              <p:cNvPr id="71" name="ZoneTexte 70">
+                <a:extLst>
+                  <a:ext uri="{FF2B5EF4-FFF2-40B4-BE49-F238E27FC236}">
+                    <a16:creationId xmlns:a16="http://schemas.microsoft.com/office/drawing/2014/main" id="{6F75565E-2535-B4F2-159E-75D9E6A88713}"/>
+                  </a:ext>
+                </a:extLst>
+              </p:cNvPr>
+              <p:cNvSpPr txBox="1"/>
+              <p:nvPr/>
+            </p:nvSpPr>
+            <p:spPr>
+              <a:xfrm>
+                <a:off x="9578884" y="3526161"/>
+                <a:ext cx="376706" cy="215444"/>
+              </a:xfrm>
+              <a:prstGeom prst="rect">
+                <a:avLst/>
+              </a:prstGeom>
+              <a:noFill/>
+            </p:spPr>
+            <p:txBody>
+              <a:bodyPr wrap="none" lIns="0" tIns="0" rIns="0" bIns="0" rtlCol="0">
+                <a:spAutoFit/>
+              </a:bodyPr>
+              <a:lstStyle/>
+              <a:p>
+                <a:pPr/>
+                <a14:m>
+                  <m:oMathPara xmlns:m="http://schemas.openxmlformats.org/officeDocument/2006/math">
+                    <m:oMathParaPr>
+                      <m:jc m:val="centerGroup"/>
+                    </m:oMathParaPr>
+                    <m:oMath xmlns:m="http://schemas.openxmlformats.org/officeDocument/2006/math">
+                      <m:r>
+                        <a:rPr lang="fr-FR" sz="1400" b="1" i="1" smtClean="0">
+                          <a:latin typeface="Cambria Math" panose="02040503050406030204" pitchFamily="18" charset="0"/>
+                        </a:rPr>
+                        <m:t>𝝁</m:t>
+                      </m:r>
+                      <m:r>
+                        <a:rPr lang="fr-FR" sz="1400" b="1" i="1" smtClean="0">
+                          <a:latin typeface="Cambria Math" panose="02040503050406030204" pitchFamily="18" charset="0"/>
+                        </a:rPr>
+                        <m:t>(</m:t>
+                      </m:r>
+                      <m:r>
+                        <a:rPr lang="fr-FR" sz="1400" b="1" i="1" smtClean="0">
+                          <a:latin typeface="Cambria Math" panose="02040503050406030204" pitchFamily="18" charset="0"/>
+                        </a:rPr>
+                        <m:t>𝒕</m:t>
+                      </m:r>
+                      <m:r>
+                        <a:rPr lang="fr-FR" sz="1400" b="1" i="1" smtClean="0">
+                          <a:latin typeface="Cambria Math" panose="02040503050406030204" pitchFamily="18" charset="0"/>
+                        </a:rPr>
+                        <m:t>)</m:t>
+                      </m:r>
+                    </m:oMath>
+                  </m:oMathPara>
+                </a14:m>
+                <a:endParaRPr lang="fr-FR" sz="1400" b="1" dirty="0"/>
+              </a:p>
+            </p:txBody>
+          </p:sp>
+        </mc:Choice>
+        <mc:Fallback xmlns="">
+          <p:sp>
+            <p:nvSpPr>
+              <p:cNvPr id="71" name="ZoneTexte 70">
+                <a:extLst>
+                  <a:ext uri="{FF2B5EF4-FFF2-40B4-BE49-F238E27FC236}">
+                    <a16:creationId xmlns:a16="http://schemas.microsoft.com/office/drawing/2014/main" id="{AEB978D1-3651-1E35-CB26-191A1D2D62D7}"/>
+                  </a:ext>
+                </a:extLst>
+              </p:cNvPr>
+              <p:cNvSpPr txBox="1">
+                <a:spLocks noRot="1" noChangeAspect="1" noMove="1" noResize="1" noEditPoints="1" noAdjustHandles="1" noChangeArrowheads="1" noChangeShapeType="1" noTextEdit="1"/>
+              </p:cNvSpPr>
+              <p:nvPr/>
+            </p:nvSpPr>
+            <p:spPr>
+              <a:xfrm>
+                <a:off x="9578884" y="3526161"/>
+                <a:ext cx="376706" cy="215444"/>
+              </a:xfrm>
+              <a:prstGeom prst="rect">
+                <a:avLst/>
+              </a:prstGeom>
+              <a:blipFill>
+                <a:blip r:embed="rId5"/>
+                <a:stretch>
+                  <a:fillRect l="-9677" r="-16129" b="-30556"/>
+                </a:stretch>
+              </a:blipFill>
+            </p:spPr>
+            <p:txBody>
+              <a:bodyPr/>
+              <a:lstStyle/>
+              <a:p>
+                <a:r>
+                  <a:rPr lang="fr-FR">
+                    <a:noFill/>
+                  </a:rPr>
+                  <a:t> </a:t>
+                </a:r>
+              </a:p>
+            </p:txBody>
+          </p:sp>
+        </mc:Fallback>
+      </mc:AlternateContent>
+      <p:cxnSp>
+        <p:nvCxnSpPr>
+          <p:cNvPr id="72" name="Connecteur droit avec flèche 71">
+            <a:extLst>
+              <a:ext uri="{FF2B5EF4-FFF2-40B4-BE49-F238E27FC236}">
+                <a16:creationId xmlns:a16="http://schemas.microsoft.com/office/drawing/2014/main" id="{9E4A2873-E469-1458-76A3-CD8C66C6742A}"/>
+              </a:ext>
+            </a:extLst>
+          </p:cNvPr>
+          <p:cNvCxnSpPr>
+            <a:cxnSpLocks/>
+          </p:cNvCxnSpPr>
+          <p:nvPr/>
+        </p:nvCxnSpPr>
+        <p:spPr>
+          <a:xfrm>
+            <a:off x="7949105" y="1832863"/>
+            <a:ext cx="7969" cy="1182236"/>
+          </a:xfrm>
+          <a:prstGeom prst="straightConnector1">
+            <a:avLst/>
+          </a:prstGeom>
+          <a:ln w="57150">
+            <a:solidFill>
+              <a:schemeClr val="accent1">
+                <a:lumMod val="50000"/>
+              </a:schemeClr>
+            </a:solidFill>
+            <a:headEnd type="stealth" w="med" len="lg"/>
+            <a:tailEnd type="stealth" w="med" len="lg"/>
+          </a:ln>
+        </p:spPr>
+        <p:style>
+          <a:lnRef idx="1">
+            <a:schemeClr val="accent1"/>
+          </a:lnRef>
+          <a:fillRef idx="0">
+            <a:schemeClr val="accent1"/>
+          </a:fillRef>
+          <a:effectRef idx="0">
+            <a:schemeClr val="accent1"/>
+          </a:effectRef>
+          <a:fontRef idx="minor">
+            <a:schemeClr val="tx1"/>
+          </a:fontRef>
+        </p:style>
+      </p:cxnSp>
+      <mc:AlternateContent xmlns:mc="http://schemas.openxmlformats.org/markup-compatibility/2006" xmlns:a14="http://schemas.microsoft.com/office/drawing/2010/main">
+        <mc:Choice Requires="a14">
+          <p:sp>
+            <p:nvSpPr>
+              <p:cNvPr id="74" name="ZoneTexte 73">
+                <a:extLst>
+                  <a:ext uri="{FF2B5EF4-FFF2-40B4-BE49-F238E27FC236}">
+                    <a16:creationId xmlns:a16="http://schemas.microsoft.com/office/drawing/2014/main" id="{5A628A96-35B3-D1C1-3D52-9ABB427148E1}"/>
+                  </a:ext>
+                </a:extLst>
+              </p:cNvPr>
+              <p:cNvSpPr txBox="1"/>
+              <p:nvPr/>
+            </p:nvSpPr>
+            <p:spPr>
+              <a:xfrm>
+                <a:off x="7495368" y="2341101"/>
+                <a:ext cx="410369" cy="215444"/>
+              </a:xfrm>
+              <a:prstGeom prst="rect">
+                <a:avLst/>
+              </a:prstGeom>
+              <a:noFill/>
+            </p:spPr>
+            <p:txBody>
+              <a:bodyPr wrap="none" lIns="0" tIns="0" rIns="0" bIns="0" rtlCol="0">
+                <a:spAutoFit/>
+              </a:bodyPr>
+              <a:lstStyle/>
+              <a:p>
+                <a:pPr/>
+                <a14:m>
+                  <m:oMathPara xmlns:m="http://schemas.openxmlformats.org/officeDocument/2006/math">
+                    <m:oMathParaPr>
+                      <m:jc m:val="centerGroup"/>
+                    </m:oMathParaPr>
+                    <m:oMath xmlns:m="http://schemas.openxmlformats.org/officeDocument/2006/math">
+                      <m:r>
+                        <a:rPr lang="fr-FR" sz="1400" b="1" i="1" smtClean="0">
+                          <a:latin typeface="Cambria Math" panose="02040503050406030204" pitchFamily="18" charset="0"/>
+                        </a:rPr>
+                        <m:t>𝝀</m:t>
+                      </m:r>
+                      <m:r>
+                        <a:rPr lang="fr-FR" sz="1400" b="1" i="1" smtClean="0">
+                          <a:latin typeface="Cambria Math" panose="02040503050406030204" pitchFamily="18" charset="0"/>
+                        </a:rPr>
+                        <m:t>′(</m:t>
+                      </m:r>
+                      <m:r>
+                        <a:rPr lang="fr-FR" sz="1400" b="1" i="1" smtClean="0">
+                          <a:latin typeface="Cambria Math" panose="02040503050406030204" pitchFamily="18" charset="0"/>
+                        </a:rPr>
+                        <m:t>𝒕</m:t>
+                      </m:r>
+                      <m:r>
+                        <a:rPr lang="fr-FR" sz="1400" b="1" i="1" smtClean="0">
+                          <a:latin typeface="Cambria Math" panose="02040503050406030204" pitchFamily="18" charset="0"/>
+                        </a:rPr>
+                        <m:t>)</m:t>
+                      </m:r>
+                    </m:oMath>
+                  </m:oMathPara>
+                </a14:m>
+                <a:endParaRPr lang="fr-FR" sz="1400" b="1" dirty="0"/>
+              </a:p>
+            </p:txBody>
+          </p:sp>
+        </mc:Choice>
+        <mc:Fallback xmlns="">
+          <p:sp>
+            <p:nvSpPr>
+              <p:cNvPr id="74" name="ZoneTexte 73">
+                <a:extLst>
+                  <a:ext uri="{FF2B5EF4-FFF2-40B4-BE49-F238E27FC236}">
+                    <a16:creationId xmlns:a16="http://schemas.microsoft.com/office/drawing/2014/main" id="{96717AE6-B13C-6D74-CB63-9A0FB714661C}"/>
+                  </a:ext>
+                </a:extLst>
+              </p:cNvPr>
+              <p:cNvSpPr txBox="1">
+                <a:spLocks noRot="1" noChangeAspect="1" noMove="1" noResize="1" noEditPoints="1" noAdjustHandles="1" noChangeArrowheads="1" noChangeShapeType="1" noTextEdit="1"/>
+              </p:cNvSpPr>
+              <p:nvPr/>
+            </p:nvSpPr>
+            <p:spPr>
+              <a:xfrm>
+                <a:off x="7495368" y="2341101"/>
+                <a:ext cx="410369" cy="215444"/>
+              </a:xfrm>
+              <a:prstGeom prst="rect">
+                <a:avLst/>
+              </a:prstGeom>
+              <a:blipFill>
+                <a:blip r:embed="rId6"/>
+                <a:stretch>
+                  <a:fillRect l="-11940" t="-2857" r="-14925" b="-34286"/>
+                </a:stretch>
+              </a:blipFill>
+            </p:spPr>
+            <p:txBody>
+              <a:bodyPr/>
+              <a:lstStyle/>
+              <a:p>
+                <a:r>
+                  <a:rPr lang="fr-FR">
+                    <a:noFill/>
+                  </a:rPr>
+                  <a:t> </a:t>
+                </a:r>
+              </a:p>
+            </p:txBody>
+          </p:sp>
+        </mc:Fallback>
+      </mc:AlternateContent>
+      <p:sp>
+        <p:nvSpPr>
+          <p:cNvPr id="68" name="Ellipse 67">
+            <a:extLst>
+              <a:ext uri="{FF2B5EF4-FFF2-40B4-BE49-F238E27FC236}">
+                <a16:creationId xmlns:a16="http://schemas.microsoft.com/office/drawing/2014/main" id="{6339B9C4-EBE6-0A95-7D37-8373B1DCEF75}"/>
+              </a:ext>
+            </a:extLst>
+          </p:cNvPr>
+          <p:cNvSpPr/>
+          <p:nvPr/>
+        </p:nvSpPr>
+        <p:spPr>
+          <a:xfrm>
+            <a:off x="2029893" y="2340545"/>
+            <a:ext cx="216000" cy="216000"/>
+          </a:xfrm>
+          <a:prstGeom prst="ellipse">
+            <a:avLst/>
+          </a:prstGeom>
+          <a:solidFill>
+            <a:schemeClr val="bg1"/>
+          </a:solidFill>
+          <a:ln w="19050">
+            <a:solidFill>
+              <a:srgbClr val="C00000"/>
+            </a:solidFill>
+          </a:ln>
+        </p:spPr>
+        <p:style>
+          <a:lnRef idx="2">
+            <a:schemeClr val="accent1">
+              <a:shade val="50000"/>
+            </a:schemeClr>
+          </a:lnRef>
+          <a:fillRef idx="1">
+            <a:schemeClr val="accent1"/>
+          </a:fillRef>
+          <a:effectRef idx="0">
+            <a:schemeClr val="accent1"/>
+          </a:effectRef>
+          <a:fontRef idx="minor">
+            <a:schemeClr val="lt1"/>
+          </a:fontRef>
+        </p:style>
+        <p:txBody>
+          <a:bodyPr rtlCol="0" anchor="ctr"/>
+          <a:lstStyle/>
+          <a:p>
+            <a:pPr algn="ctr"/>
+            <a:r>
+              <a:rPr lang="fr-FR" sz="1050" b="1" dirty="0">
+                <a:solidFill>
+                  <a:srgbClr val="C00000"/>
+                </a:solidFill>
+              </a:rPr>
+              <a:t>6</a:t>
+            </a:r>
+            <a:endParaRPr lang="fr-FR" sz="1400" b="1" dirty="0">
+              <a:solidFill>
+                <a:srgbClr val="C00000"/>
+              </a:solidFill>
+            </a:endParaRPr>
+          </a:p>
+        </p:txBody>
+      </p:sp>
+      <p:sp>
+        <p:nvSpPr>
+          <p:cNvPr id="69" name="Ellipse 68">
+            <a:extLst>
+              <a:ext uri="{FF2B5EF4-FFF2-40B4-BE49-F238E27FC236}">
+                <a16:creationId xmlns:a16="http://schemas.microsoft.com/office/drawing/2014/main" id="{BC08192A-8F58-3F8D-E5DD-A7709585FF98}"/>
+              </a:ext>
+            </a:extLst>
+          </p:cNvPr>
+          <p:cNvSpPr/>
+          <p:nvPr/>
+        </p:nvSpPr>
+        <p:spPr>
+          <a:xfrm>
+            <a:off x="948312" y="1886291"/>
+            <a:ext cx="216000" cy="216000"/>
+          </a:xfrm>
+          <a:prstGeom prst="ellipse">
+            <a:avLst/>
+          </a:prstGeom>
+          <a:solidFill>
+            <a:schemeClr val="bg1"/>
+          </a:solidFill>
+          <a:ln w="19050">
+            <a:solidFill>
+              <a:srgbClr val="FFC000"/>
+            </a:solidFill>
+          </a:ln>
+        </p:spPr>
+        <p:style>
+          <a:lnRef idx="2">
+            <a:schemeClr val="accent1">
+              <a:shade val="50000"/>
+            </a:schemeClr>
+          </a:lnRef>
+          <a:fillRef idx="1">
+            <a:schemeClr val="accent1"/>
+          </a:fillRef>
+          <a:effectRef idx="0">
+            <a:schemeClr val="accent1"/>
+          </a:effectRef>
+          <a:fontRef idx="minor">
+            <a:schemeClr val="lt1"/>
+          </a:fontRef>
+        </p:style>
+        <p:txBody>
+          <a:bodyPr rtlCol="0" anchor="ctr"/>
+          <a:lstStyle/>
+          <a:p>
+            <a:pPr algn="ctr"/>
+            <a:r>
+              <a:rPr lang="fr-FR" sz="1050" b="1" dirty="0">
+                <a:solidFill>
+                  <a:srgbClr val="FFC000"/>
+                </a:solidFill>
+              </a:rPr>
+              <a:t>a</a:t>
+            </a:r>
+            <a:endParaRPr lang="fr-FR" sz="1400" b="1" dirty="0">
+              <a:solidFill>
+                <a:srgbClr val="FFC000"/>
+              </a:solidFill>
+            </a:endParaRPr>
+          </a:p>
+        </p:txBody>
+      </p:sp>
+      <p:sp>
+        <p:nvSpPr>
+          <p:cNvPr id="73" name="Ellipse 72">
+            <a:extLst>
+              <a:ext uri="{FF2B5EF4-FFF2-40B4-BE49-F238E27FC236}">
+                <a16:creationId xmlns:a16="http://schemas.microsoft.com/office/drawing/2014/main" id="{2AF0090C-03DF-EEE1-E118-F63DF1B03C02}"/>
+              </a:ext>
+            </a:extLst>
+          </p:cNvPr>
+          <p:cNvSpPr/>
+          <p:nvPr/>
+        </p:nvSpPr>
+        <p:spPr>
+          <a:xfrm>
+            <a:off x="2388060" y="1886291"/>
+            <a:ext cx="216000" cy="216000"/>
+          </a:xfrm>
+          <a:prstGeom prst="ellipse">
+            <a:avLst/>
+          </a:prstGeom>
+          <a:solidFill>
+            <a:schemeClr val="bg1"/>
+          </a:solidFill>
+          <a:ln w="19050">
+            <a:solidFill>
+              <a:srgbClr val="7030A0"/>
+            </a:solidFill>
+          </a:ln>
+        </p:spPr>
+        <p:style>
+          <a:lnRef idx="2">
+            <a:schemeClr val="accent1">
+              <a:shade val="50000"/>
+            </a:schemeClr>
+          </a:lnRef>
+          <a:fillRef idx="1">
+            <a:schemeClr val="accent1"/>
+          </a:fillRef>
+          <a:effectRef idx="0">
+            <a:schemeClr val="accent1"/>
+          </a:effectRef>
+          <a:fontRef idx="minor">
+            <a:schemeClr val="lt1"/>
+          </a:fontRef>
+        </p:style>
+        <p:txBody>
+          <a:bodyPr rtlCol="0" anchor="ctr"/>
+          <a:lstStyle/>
+          <a:p>
+            <a:pPr algn="ctr"/>
+            <a:r>
+              <a:rPr lang="fr-FR" sz="1050" b="1" dirty="0">
+                <a:solidFill>
+                  <a:srgbClr val="7030A0"/>
+                </a:solidFill>
+              </a:rPr>
+              <a:t>d</a:t>
+            </a:r>
+            <a:endParaRPr lang="fr-FR" sz="1400" b="1" dirty="0">
+              <a:solidFill>
+                <a:srgbClr val="7030A0"/>
+              </a:solidFill>
+            </a:endParaRPr>
+          </a:p>
+        </p:txBody>
+      </p:sp>
+      <p:sp>
+        <p:nvSpPr>
+          <p:cNvPr id="77" name="Ellipse 76">
+            <a:extLst>
+              <a:ext uri="{FF2B5EF4-FFF2-40B4-BE49-F238E27FC236}">
+                <a16:creationId xmlns:a16="http://schemas.microsoft.com/office/drawing/2014/main" id="{B9B6A03B-8A01-C195-5AD7-047EEDF6EDF4}"/>
+              </a:ext>
+            </a:extLst>
+          </p:cNvPr>
+          <p:cNvSpPr/>
+          <p:nvPr/>
+        </p:nvSpPr>
+        <p:spPr>
+          <a:xfrm>
+            <a:off x="1668186" y="1886291"/>
+            <a:ext cx="216000" cy="216000"/>
+          </a:xfrm>
+          <a:prstGeom prst="ellipse">
+            <a:avLst/>
+          </a:prstGeom>
+          <a:solidFill>
+            <a:schemeClr val="bg1"/>
+          </a:solidFill>
+          <a:ln w="19050">
+            <a:solidFill>
+              <a:srgbClr val="7030A0"/>
+            </a:solidFill>
+          </a:ln>
+        </p:spPr>
+        <p:style>
+          <a:lnRef idx="2">
+            <a:schemeClr val="accent1">
+              <a:shade val="50000"/>
+            </a:schemeClr>
+          </a:lnRef>
+          <a:fillRef idx="1">
+            <a:schemeClr val="accent1"/>
+          </a:fillRef>
+          <a:effectRef idx="0">
+            <a:schemeClr val="accent1"/>
+          </a:effectRef>
+          <a:fontRef idx="minor">
+            <a:schemeClr val="lt1"/>
+          </a:fontRef>
+        </p:style>
+        <p:txBody>
+          <a:bodyPr rtlCol="0" anchor="ctr"/>
+          <a:lstStyle/>
+          <a:p>
+            <a:pPr algn="ctr"/>
+            <a:r>
+              <a:rPr lang="fr-FR" sz="1050" b="1" dirty="0">
+                <a:solidFill>
+                  <a:srgbClr val="7030A0"/>
+                </a:solidFill>
+              </a:rPr>
+              <a:t>b</a:t>
+            </a:r>
+            <a:endParaRPr lang="fr-FR" sz="1400" b="1" dirty="0">
+              <a:solidFill>
+                <a:srgbClr val="7030A0"/>
+              </a:solidFill>
+            </a:endParaRPr>
+          </a:p>
+        </p:txBody>
+      </p:sp>
+      <p:sp>
+        <p:nvSpPr>
+          <p:cNvPr id="78" name="Ellipse 77">
+            <a:extLst>
+              <a:ext uri="{FF2B5EF4-FFF2-40B4-BE49-F238E27FC236}">
+                <a16:creationId xmlns:a16="http://schemas.microsoft.com/office/drawing/2014/main" id="{2B212495-0A11-39A4-F589-02DEA24E8266}"/>
+              </a:ext>
+            </a:extLst>
+          </p:cNvPr>
+          <p:cNvSpPr/>
+          <p:nvPr/>
+        </p:nvSpPr>
+        <p:spPr>
+          <a:xfrm>
+            <a:off x="3107934" y="1886291"/>
+            <a:ext cx="216000" cy="216000"/>
+          </a:xfrm>
+          <a:prstGeom prst="ellipse">
+            <a:avLst/>
+          </a:prstGeom>
+          <a:solidFill>
+            <a:schemeClr val="bg1"/>
+          </a:solidFill>
+          <a:ln w="19050">
+            <a:solidFill>
+              <a:srgbClr val="FFC000"/>
+            </a:solidFill>
+          </a:ln>
+        </p:spPr>
+        <p:style>
+          <a:lnRef idx="2">
+            <a:schemeClr val="accent1">
+              <a:shade val="50000"/>
+            </a:schemeClr>
+          </a:lnRef>
+          <a:fillRef idx="1">
+            <a:schemeClr val="accent1"/>
+          </a:fillRef>
+          <a:effectRef idx="0">
+            <a:schemeClr val="accent1"/>
+          </a:effectRef>
+          <a:fontRef idx="minor">
+            <a:schemeClr val="lt1"/>
+          </a:fontRef>
+        </p:style>
+        <p:txBody>
+          <a:bodyPr rtlCol="0" anchor="ctr"/>
+          <a:lstStyle/>
+          <a:p>
+            <a:pPr algn="ctr"/>
+            <a:r>
+              <a:rPr lang="fr-FR" sz="1050" b="1" dirty="0">
+                <a:solidFill>
+                  <a:srgbClr val="FFC000"/>
+                </a:solidFill>
+              </a:rPr>
+              <a:t>c</a:t>
+            </a:r>
+            <a:endParaRPr lang="fr-FR" sz="1400" b="1" dirty="0">
+              <a:solidFill>
+                <a:srgbClr val="FFC000"/>
+              </a:solidFill>
+            </a:endParaRPr>
+          </a:p>
+        </p:txBody>
+      </p:sp>
+      <p:sp>
+        <p:nvSpPr>
+          <p:cNvPr id="84" name="Ellipse 83">
+            <a:extLst>
+              <a:ext uri="{FF2B5EF4-FFF2-40B4-BE49-F238E27FC236}">
+                <a16:creationId xmlns:a16="http://schemas.microsoft.com/office/drawing/2014/main" id="{CBA93067-A860-1813-A4BE-8BB6DDD31121}"/>
+              </a:ext>
+            </a:extLst>
+          </p:cNvPr>
+          <p:cNvSpPr/>
+          <p:nvPr/>
+        </p:nvSpPr>
+        <p:spPr>
+          <a:xfrm>
+            <a:off x="2035550" y="1425754"/>
+            <a:ext cx="216000" cy="216000"/>
+          </a:xfrm>
+          <a:prstGeom prst="ellipse">
+            <a:avLst/>
+          </a:prstGeom>
+          <a:solidFill>
+            <a:schemeClr val="bg1"/>
+          </a:solidFill>
+          <a:ln w="19050">
+            <a:solidFill>
+              <a:srgbClr val="0070C0"/>
+            </a:solidFill>
+          </a:ln>
+        </p:spPr>
+        <p:style>
+          <a:lnRef idx="2">
+            <a:schemeClr val="accent1">
+              <a:shade val="50000"/>
+            </a:schemeClr>
+          </a:lnRef>
+          <a:fillRef idx="1">
+            <a:schemeClr val="accent1"/>
+          </a:fillRef>
+          <a:effectRef idx="0">
+            <a:schemeClr val="accent1"/>
+          </a:effectRef>
+          <a:fontRef idx="minor">
+            <a:schemeClr val="lt1"/>
+          </a:fontRef>
+        </p:style>
+        <p:txBody>
+          <a:bodyPr lIns="0" tIns="0" rIns="0" bIns="0" rtlCol="0" anchor="ctr"/>
+          <a:lstStyle/>
+          <a:p>
+            <a:pPr algn="ctr"/>
+            <a:r>
+              <a:rPr lang="fr-FR" sz="1000" b="1" dirty="0">
+                <a:solidFill>
+                  <a:srgbClr val="0070C0"/>
+                </a:solidFill>
+              </a:rPr>
+              <a:t>11</a:t>
+            </a:r>
+            <a:endParaRPr lang="fr-FR" sz="1200" b="1" dirty="0">
+              <a:solidFill>
+                <a:srgbClr val="0070C0"/>
+              </a:solidFill>
+            </a:endParaRPr>
+          </a:p>
+        </p:txBody>
+      </p:sp>
+      <p:cxnSp>
+        <p:nvCxnSpPr>
+          <p:cNvPr id="86" name="Connecteur droit 85">
+            <a:extLst>
+              <a:ext uri="{FF2B5EF4-FFF2-40B4-BE49-F238E27FC236}">
+                <a16:creationId xmlns:a16="http://schemas.microsoft.com/office/drawing/2014/main" id="{6EBCBB3C-77FA-572A-BE53-4BC39BFFDE8D}"/>
+              </a:ext>
+            </a:extLst>
+          </p:cNvPr>
+          <p:cNvCxnSpPr>
+            <a:stCxn id="69" idx="7"/>
+            <a:endCxn id="84" idx="2"/>
+          </p:cNvCxnSpPr>
+          <p:nvPr/>
+        </p:nvCxnSpPr>
+        <p:spPr>
+          <a:xfrm flipV="1">
+            <a:off x="1132680" y="1533754"/>
+            <a:ext cx="902870" cy="384169"/>
+          </a:xfrm>
+          <a:prstGeom prst="line">
+            <a:avLst/>
+          </a:prstGeom>
+        </p:spPr>
+        <p:style>
+          <a:lnRef idx="1">
+            <a:schemeClr val="accent1"/>
+          </a:lnRef>
+          <a:fillRef idx="0">
+            <a:schemeClr val="accent1"/>
+          </a:fillRef>
+          <a:effectRef idx="0">
+            <a:schemeClr val="accent1"/>
+          </a:effectRef>
+          <a:fontRef idx="minor">
+            <a:schemeClr val="tx1"/>
+          </a:fontRef>
+        </p:style>
+      </p:cxnSp>
+      <p:cxnSp>
+        <p:nvCxnSpPr>
+          <p:cNvPr id="87" name="Connecteur droit 86">
+            <a:extLst>
+              <a:ext uri="{FF2B5EF4-FFF2-40B4-BE49-F238E27FC236}">
+                <a16:creationId xmlns:a16="http://schemas.microsoft.com/office/drawing/2014/main" id="{9780EB08-94D8-B0E3-ECDE-5B8826449D85}"/>
+              </a:ext>
+            </a:extLst>
+          </p:cNvPr>
+          <p:cNvCxnSpPr>
+            <a:cxnSpLocks/>
+            <a:stCxn id="78" idx="0"/>
+            <a:endCxn id="84" idx="6"/>
+          </p:cNvCxnSpPr>
+          <p:nvPr/>
+        </p:nvCxnSpPr>
+        <p:spPr>
+          <a:xfrm flipH="1" flipV="1">
+            <a:off x="2251550" y="1533754"/>
+            <a:ext cx="964384" cy="352537"/>
+          </a:xfrm>
+          <a:prstGeom prst="line">
+            <a:avLst/>
+          </a:prstGeom>
+        </p:spPr>
+        <p:style>
+          <a:lnRef idx="1">
+            <a:schemeClr val="accent1"/>
+          </a:lnRef>
+          <a:fillRef idx="0">
+            <a:schemeClr val="accent1"/>
+          </a:fillRef>
+          <a:effectRef idx="0">
+            <a:schemeClr val="accent1"/>
+          </a:effectRef>
+          <a:fontRef idx="minor">
+            <a:schemeClr val="tx1"/>
+          </a:fontRef>
+        </p:style>
+      </p:cxnSp>
+      <p:cxnSp>
+        <p:nvCxnSpPr>
+          <p:cNvPr id="90" name="Connecteur droit 89">
+            <a:extLst>
+              <a:ext uri="{FF2B5EF4-FFF2-40B4-BE49-F238E27FC236}">
+                <a16:creationId xmlns:a16="http://schemas.microsoft.com/office/drawing/2014/main" id="{B5E628F8-35AC-3EE7-399A-076041BD1D8D}"/>
+              </a:ext>
+            </a:extLst>
+          </p:cNvPr>
+          <p:cNvCxnSpPr>
+            <a:cxnSpLocks/>
+            <a:stCxn id="77" idx="7"/>
+            <a:endCxn id="84" idx="3"/>
+          </p:cNvCxnSpPr>
+          <p:nvPr/>
+        </p:nvCxnSpPr>
+        <p:spPr>
+          <a:xfrm flipV="1">
+            <a:off x="1852554" y="1610122"/>
+            <a:ext cx="214628" cy="307801"/>
+          </a:xfrm>
+          <a:prstGeom prst="line">
+            <a:avLst/>
+          </a:prstGeom>
+        </p:spPr>
+        <p:style>
+          <a:lnRef idx="1">
+            <a:schemeClr val="accent1"/>
+          </a:lnRef>
+          <a:fillRef idx="0">
+            <a:schemeClr val="accent1"/>
+          </a:fillRef>
+          <a:effectRef idx="0">
+            <a:schemeClr val="accent1"/>
+          </a:effectRef>
+          <a:fontRef idx="minor">
+            <a:schemeClr val="tx1"/>
+          </a:fontRef>
+        </p:style>
+      </p:cxnSp>
+      <p:cxnSp>
+        <p:nvCxnSpPr>
+          <p:cNvPr id="94" name="Connecteur droit 93">
+            <a:extLst>
+              <a:ext uri="{FF2B5EF4-FFF2-40B4-BE49-F238E27FC236}">
+                <a16:creationId xmlns:a16="http://schemas.microsoft.com/office/drawing/2014/main" id="{2A140BFC-A468-8CFE-EB46-6900B6538085}"/>
+              </a:ext>
+            </a:extLst>
+          </p:cNvPr>
+          <p:cNvCxnSpPr>
+            <a:cxnSpLocks/>
+            <a:stCxn id="73" idx="1"/>
+            <a:endCxn id="84" idx="5"/>
+          </p:cNvCxnSpPr>
+          <p:nvPr/>
+        </p:nvCxnSpPr>
+        <p:spPr>
+          <a:xfrm flipH="1" flipV="1">
+            <a:off x="2219918" y="1610122"/>
+            <a:ext cx="199774" cy="307801"/>
+          </a:xfrm>
+          <a:prstGeom prst="line">
+            <a:avLst/>
+          </a:prstGeom>
+        </p:spPr>
+        <p:style>
+          <a:lnRef idx="1">
+            <a:schemeClr val="accent1"/>
+          </a:lnRef>
+          <a:fillRef idx="0">
+            <a:schemeClr val="accent1"/>
+          </a:fillRef>
+          <a:effectRef idx="0">
+            <a:schemeClr val="accent1"/>
+          </a:effectRef>
+          <a:fontRef idx="minor">
+            <a:schemeClr val="tx1"/>
+          </a:fontRef>
+        </p:style>
+      </p:cxnSp>
+      <p:cxnSp>
+        <p:nvCxnSpPr>
+          <p:cNvPr id="97" name="Connecteur droit 96">
+            <a:extLst>
+              <a:ext uri="{FF2B5EF4-FFF2-40B4-BE49-F238E27FC236}">
+                <a16:creationId xmlns:a16="http://schemas.microsoft.com/office/drawing/2014/main" id="{EA050619-9FA9-1B02-3E3A-B71DFB02FCB6}"/>
+              </a:ext>
+            </a:extLst>
+          </p:cNvPr>
+          <p:cNvCxnSpPr>
+            <a:cxnSpLocks/>
+            <a:stCxn id="77" idx="5"/>
+            <a:endCxn id="68" idx="1"/>
+          </p:cNvCxnSpPr>
+          <p:nvPr/>
+        </p:nvCxnSpPr>
+        <p:spPr>
+          <a:xfrm>
+            <a:off x="1852554" y="2070659"/>
+            <a:ext cx="208971" cy="301518"/>
+          </a:xfrm>
+          <a:prstGeom prst="line">
+            <a:avLst/>
+          </a:prstGeom>
+        </p:spPr>
+        <p:style>
+          <a:lnRef idx="1">
+            <a:schemeClr val="accent1"/>
+          </a:lnRef>
+          <a:fillRef idx="0">
+            <a:schemeClr val="accent1"/>
+          </a:fillRef>
+          <a:effectRef idx="0">
+            <a:schemeClr val="accent1"/>
+          </a:effectRef>
+          <a:fontRef idx="minor">
+            <a:schemeClr val="tx1"/>
+          </a:fontRef>
+        </p:style>
+      </p:cxnSp>
+      <p:cxnSp>
+        <p:nvCxnSpPr>
+          <p:cNvPr id="101" name="Connecteur droit 100">
+            <a:extLst>
+              <a:ext uri="{FF2B5EF4-FFF2-40B4-BE49-F238E27FC236}">
+                <a16:creationId xmlns:a16="http://schemas.microsoft.com/office/drawing/2014/main" id="{E47C9742-C950-BE90-9561-CD2858D1907D}"/>
+              </a:ext>
+            </a:extLst>
+          </p:cNvPr>
+          <p:cNvCxnSpPr>
+            <a:cxnSpLocks/>
+            <a:stCxn id="69" idx="5"/>
+            <a:endCxn id="68" idx="2"/>
+          </p:cNvCxnSpPr>
+          <p:nvPr/>
+        </p:nvCxnSpPr>
+        <p:spPr>
+          <a:xfrm>
+            <a:off x="1132680" y="2070659"/>
+            <a:ext cx="897213" cy="377886"/>
+          </a:xfrm>
+          <a:prstGeom prst="line">
+            <a:avLst/>
+          </a:prstGeom>
+        </p:spPr>
+        <p:style>
+          <a:lnRef idx="1">
+            <a:schemeClr val="accent1"/>
+          </a:lnRef>
+          <a:fillRef idx="0">
+            <a:schemeClr val="accent1"/>
+          </a:fillRef>
+          <a:effectRef idx="0">
+            <a:schemeClr val="accent1"/>
+          </a:effectRef>
+          <a:fontRef idx="minor">
+            <a:schemeClr val="tx1"/>
+          </a:fontRef>
+        </p:style>
+      </p:cxnSp>
+      <p:cxnSp>
+        <p:nvCxnSpPr>
+          <p:cNvPr id="105" name="Connecteur droit 104">
+            <a:extLst>
+              <a:ext uri="{FF2B5EF4-FFF2-40B4-BE49-F238E27FC236}">
+                <a16:creationId xmlns:a16="http://schemas.microsoft.com/office/drawing/2014/main" id="{2A0E4F22-77E5-ECB3-6391-1BC571F0F03F}"/>
+              </a:ext>
+            </a:extLst>
+          </p:cNvPr>
+          <p:cNvCxnSpPr>
+            <a:cxnSpLocks/>
+            <a:stCxn id="73" idx="3"/>
+            <a:endCxn id="68" idx="7"/>
+          </p:cNvCxnSpPr>
+          <p:nvPr/>
+        </p:nvCxnSpPr>
+        <p:spPr>
+          <a:xfrm flipH="1">
+            <a:off x="2214261" y="2070659"/>
+            <a:ext cx="205431" cy="301518"/>
+          </a:xfrm>
+          <a:prstGeom prst="line">
+            <a:avLst/>
+          </a:prstGeom>
+        </p:spPr>
+        <p:style>
+          <a:lnRef idx="1">
+            <a:schemeClr val="accent1"/>
+          </a:lnRef>
+          <a:fillRef idx="0">
+            <a:schemeClr val="accent1"/>
+          </a:fillRef>
+          <a:effectRef idx="0">
+            <a:schemeClr val="accent1"/>
+          </a:effectRef>
+          <a:fontRef idx="minor">
+            <a:schemeClr val="tx1"/>
+          </a:fontRef>
+        </p:style>
+      </p:cxnSp>
+      <p:cxnSp>
+        <p:nvCxnSpPr>
+          <p:cNvPr id="109" name="Connecteur droit 108">
+            <a:extLst>
+              <a:ext uri="{FF2B5EF4-FFF2-40B4-BE49-F238E27FC236}">
+                <a16:creationId xmlns:a16="http://schemas.microsoft.com/office/drawing/2014/main" id="{4854CB11-8A10-2346-27F0-91474B3A279B}"/>
+              </a:ext>
+            </a:extLst>
+          </p:cNvPr>
+          <p:cNvCxnSpPr>
+            <a:cxnSpLocks/>
+            <a:stCxn id="78" idx="4"/>
+            <a:endCxn id="68" idx="6"/>
+          </p:cNvCxnSpPr>
+          <p:nvPr/>
+        </p:nvCxnSpPr>
+        <p:spPr>
+          <a:xfrm flipH="1">
+            <a:off x="2245893" y="2102291"/>
+            <a:ext cx="970041" cy="346254"/>
+          </a:xfrm>
+          <a:prstGeom prst="line">
+            <a:avLst/>
+          </a:prstGeom>
+        </p:spPr>
+        <p:style>
+          <a:lnRef idx="1">
+            <a:schemeClr val="accent1"/>
+          </a:lnRef>
+          <a:fillRef idx="0">
+            <a:schemeClr val="accent1"/>
+          </a:fillRef>
+          <a:effectRef idx="0">
+            <a:schemeClr val="accent1"/>
+          </a:effectRef>
+          <a:fontRef idx="minor">
+            <a:schemeClr val="tx1"/>
+          </a:fontRef>
+        </p:style>
+      </p:cxnSp>
+      <p:cxnSp>
+        <p:nvCxnSpPr>
+          <p:cNvPr id="113" name="Connecteur droit 112">
+            <a:extLst>
+              <a:ext uri="{FF2B5EF4-FFF2-40B4-BE49-F238E27FC236}">
+                <a16:creationId xmlns:a16="http://schemas.microsoft.com/office/drawing/2014/main" id="{01B35842-5C04-0DA8-4407-6B8F2A6E7A40}"/>
+              </a:ext>
+            </a:extLst>
+          </p:cNvPr>
+          <p:cNvCxnSpPr>
+            <a:cxnSpLocks/>
+            <a:stCxn id="77" idx="2"/>
+            <a:endCxn id="69" idx="6"/>
+          </p:cNvCxnSpPr>
+          <p:nvPr/>
+        </p:nvCxnSpPr>
+        <p:spPr>
+          <a:xfrm flipH="1">
+            <a:off x="1164312" y="1994291"/>
+            <a:ext cx="503874" cy="0"/>
+          </a:xfrm>
+          <a:prstGeom prst="line">
+            <a:avLst/>
+          </a:prstGeom>
+        </p:spPr>
+        <p:style>
+          <a:lnRef idx="1">
+            <a:schemeClr val="accent1"/>
+          </a:lnRef>
+          <a:fillRef idx="0">
+            <a:schemeClr val="accent1"/>
+          </a:fillRef>
+          <a:effectRef idx="0">
+            <a:schemeClr val="accent1"/>
+          </a:effectRef>
+          <a:fontRef idx="minor">
+            <a:schemeClr val="tx1"/>
+          </a:fontRef>
+        </p:style>
+      </p:cxnSp>
+      <p:cxnSp>
+        <p:nvCxnSpPr>
+          <p:cNvPr id="116" name="Connecteur droit 115">
+            <a:extLst>
+              <a:ext uri="{FF2B5EF4-FFF2-40B4-BE49-F238E27FC236}">
+                <a16:creationId xmlns:a16="http://schemas.microsoft.com/office/drawing/2014/main" id="{87B99ECA-A293-3E5C-1D54-0B2CBE1F3E63}"/>
+              </a:ext>
+            </a:extLst>
+          </p:cNvPr>
+          <p:cNvCxnSpPr>
+            <a:cxnSpLocks/>
+            <a:stCxn id="73" idx="6"/>
+            <a:endCxn id="78" idx="2"/>
+          </p:cNvCxnSpPr>
+          <p:nvPr/>
+        </p:nvCxnSpPr>
+        <p:spPr>
+          <a:xfrm>
+            <a:off x="2604060" y="1994291"/>
+            <a:ext cx="503874" cy="0"/>
+          </a:xfrm>
+          <a:prstGeom prst="line">
+            <a:avLst/>
+          </a:prstGeom>
+        </p:spPr>
+        <p:style>
+          <a:lnRef idx="1">
+            <a:schemeClr val="accent1"/>
+          </a:lnRef>
+          <a:fillRef idx="0">
+            <a:schemeClr val="accent1"/>
+          </a:fillRef>
+          <a:effectRef idx="0">
+            <a:schemeClr val="accent1"/>
+          </a:effectRef>
+          <a:fontRef idx="minor">
+            <a:schemeClr val="tx1"/>
+          </a:fontRef>
+        </p:style>
+      </p:cxnSp>
+      <p:sp>
+        <p:nvSpPr>
+          <p:cNvPr id="123" name="Éclair 122">
+            <a:extLst>
+              <a:ext uri="{FF2B5EF4-FFF2-40B4-BE49-F238E27FC236}">
+                <a16:creationId xmlns:a16="http://schemas.microsoft.com/office/drawing/2014/main" id="{06A486A0-1C4D-106C-BF41-DFD0D1EAD20D}"/>
+              </a:ext>
+            </a:extLst>
+          </p:cNvPr>
+          <p:cNvSpPr/>
+          <p:nvPr/>
+        </p:nvSpPr>
+        <p:spPr>
+          <a:xfrm rot="16610671">
+            <a:off x="2832745" y="2088074"/>
+            <a:ext cx="309842" cy="229632"/>
+          </a:xfrm>
+          <a:prstGeom prst="lightningBolt">
+            <a:avLst/>
+          </a:prstGeom>
+        </p:spPr>
+        <p:style>
+          <a:lnRef idx="2">
+            <a:schemeClr val="accent1">
+              <a:shade val="15000"/>
+            </a:schemeClr>
+          </a:lnRef>
+          <a:fillRef idx="1">
+            <a:schemeClr val="accent1"/>
+          </a:fillRef>
+          <a:effectRef idx="0">
+            <a:schemeClr val="accent1"/>
+          </a:effectRef>
+          <a:fontRef idx="minor">
+            <a:schemeClr val="lt1"/>
+          </a:fontRef>
+        </p:style>
+        <p:txBody>
+          <a:bodyPr rtlCol="0" anchor="ctr"/>
+          <a:lstStyle/>
+          <a:p>
+            <a:pPr algn="ctr"/>
+            <a:endParaRPr lang="fr-FR"/>
+          </a:p>
+        </p:txBody>
+      </p:sp>
+      <p:sp>
+        <p:nvSpPr>
+          <p:cNvPr id="124" name="Éclair 123">
+            <a:extLst>
+              <a:ext uri="{FF2B5EF4-FFF2-40B4-BE49-F238E27FC236}">
+                <a16:creationId xmlns:a16="http://schemas.microsoft.com/office/drawing/2014/main" id="{5F2D3A69-CE1E-E59E-13A4-6C43EEBEBE9F}"/>
+              </a:ext>
+            </a:extLst>
+          </p:cNvPr>
+          <p:cNvSpPr/>
+          <p:nvPr/>
+        </p:nvSpPr>
+        <p:spPr>
+          <a:xfrm rot="4989329" flipH="1">
+            <a:off x="1869417" y="2050710"/>
+            <a:ext cx="309842" cy="229632"/>
+          </a:xfrm>
+          <a:prstGeom prst="lightningBolt">
+            <a:avLst/>
+          </a:prstGeom>
+        </p:spPr>
+        <p:style>
+          <a:lnRef idx="2">
+            <a:schemeClr val="accent1">
+              <a:shade val="15000"/>
+            </a:schemeClr>
+          </a:lnRef>
+          <a:fillRef idx="1">
+            <a:schemeClr val="accent1"/>
+          </a:fillRef>
+          <a:effectRef idx="0">
+            <a:schemeClr val="accent1"/>
+          </a:effectRef>
+          <a:fontRef idx="minor">
+            <a:schemeClr val="lt1"/>
+          </a:fontRef>
+        </p:style>
+        <p:txBody>
+          <a:bodyPr rtlCol="0" anchor="ctr"/>
+          <a:lstStyle/>
+          <a:p>
+            <a:pPr algn="ctr"/>
+            <a:endParaRPr lang="fr-FR"/>
+          </a:p>
+        </p:txBody>
+      </p:sp>
+      <p:sp>
+        <p:nvSpPr>
+          <p:cNvPr id="125" name="Éclair 124">
+            <a:extLst>
+              <a:ext uri="{FF2B5EF4-FFF2-40B4-BE49-F238E27FC236}">
+                <a16:creationId xmlns:a16="http://schemas.microsoft.com/office/drawing/2014/main" id="{D28E7565-103E-9441-0486-8CB71CD91472}"/>
+              </a:ext>
+            </a:extLst>
+          </p:cNvPr>
+          <p:cNvSpPr/>
+          <p:nvPr/>
+        </p:nvSpPr>
+        <p:spPr>
+          <a:xfrm rot="6007576">
+            <a:off x="2152409" y="1155654"/>
+            <a:ext cx="309842" cy="229632"/>
+          </a:xfrm>
+          <a:prstGeom prst="lightningBolt">
+            <a:avLst/>
+          </a:prstGeom>
+        </p:spPr>
+        <p:style>
+          <a:lnRef idx="2">
+            <a:schemeClr val="accent1">
+              <a:shade val="15000"/>
+            </a:schemeClr>
+          </a:lnRef>
+          <a:fillRef idx="1">
+            <a:schemeClr val="accent1"/>
+          </a:fillRef>
+          <a:effectRef idx="0">
+            <a:schemeClr val="accent1"/>
+          </a:effectRef>
+          <a:fontRef idx="minor">
+            <a:schemeClr val="lt1"/>
+          </a:fontRef>
+        </p:style>
+        <p:txBody>
+          <a:bodyPr rtlCol="0" anchor="ctr"/>
+          <a:lstStyle/>
+          <a:p>
+            <a:pPr algn="ctr"/>
+            <a:endParaRPr lang="fr-FR"/>
+          </a:p>
+        </p:txBody>
+      </p:sp>
+      <mc:AlternateContent xmlns:mc="http://schemas.openxmlformats.org/markup-compatibility/2006">
+        <mc:Choice xmlns:a14="http://schemas.microsoft.com/office/drawing/2010/main" Requires="a14">
+          <p:sp>
+            <p:nvSpPr>
+              <p:cNvPr id="126" name="Espace réservé du contenu 2">
+                <a:extLst>
+                  <a:ext uri="{FF2B5EF4-FFF2-40B4-BE49-F238E27FC236}">
+                    <a16:creationId xmlns:a16="http://schemas.microsoft.com/office/drawing/2014/main" id="{E093C812-7200-6E73-1731-EB2B34757C0D}"/>
+                  </a:ext>
+                </a:extLst>
+              </p:cNvPr>
+              <p:cNvSpPr>
+                <a:spLocks noGrp="1"/>
+              </p:cNvSpPr>
+              <p:nvPr>
+                <p:ph idx="1"/>
+              </p:nvPr>
+            </p:nvSpPr>
+            <p:spPr>
+              <a:xfrm>
+                <a:off x="117795" y="2801082"/>
+                <a:ext cx="6228187" cy="3434144"/>
+              </a:xfrm>
+            </p:spPr>
+            <p:txBody>
+              <a:bodyPr>
+                <a:normAutofit/>
+              </a:bodyPr>
+              <a:lstStyle/>
+              <a:p>
+                <a14:m>
+                  <m:oMath xmlns:m="http://schemas.openxmlformats.org/officeDocument/2006/math">
+                    <m:r>
+                      <a:rPr lang="fr-FR" b="0" i="1" smtClean="0">
+                        <a:latin typeface="Cambria Math" panose="02040503050406030204" pitchFamily="18" charset="0"/>
+                      </a:rPr>
+                      <m:t>𝑚</m:t>
+                    </m:r>
+                    <m:r>
+                      <a:rPr lang="fr-FR" b="0" i="1" smtClean="0">
+                        <a:latin typeface="Cambria Math" panose="02040503050406030204" pitchFamily="18" charset="0"/>
+                      </a:rPr>
+                      <m:t>=1</m:t>
+                    </m:r>
+                  </m:oMath>
+                </a14:m>
+                <a:endParaRPr lang="fr-FR" b="0" dirty="0"/>
+              </a:p>
+              <a:p>
+                <a14:m>
+                  <m:oMath xmlns:m="http://schemas.openxmlformats.org/officeDocument/2006/math">
+                    <m:sSub>
+                      <m:sSubPr>
+                        <m:ctrlPr>
+                          <a:rPr lang="fr-FR" b="0" i="1" smtClean="0">
+                            <a:latin typeface="Cambria Math" panose="02040503050406030204" pitchFamily="18" charset="0"/>
+                          </a:rPr>
+                        </m:ctrlPr>
+                      </m:sSubPr>
+                      <m:e>
+                        <m:r>
+                          <a:rPr lang="fr-FR" b="0" i="1" smtClean="0">
+                            <a:latin typeface="Cambria Math" panose="02040503050406030204" pitchFamily="18" charset="0"/>
+                          </a:rPr>
+                          <m:t>𝐼</m:t>
+                        </m:r>
+                      </m:e>
+                      <m:sub>
+                        <m:r>
+                          <a:rPr lang="fr-FR" b="0" i="1" smtClean="0">
+                            <a:latin typeface="Cambria Math" panose="02040503050406030204" pitchFamily="18" charset="0"/>
+                          </a:rPr>
+                          <m:t>𝑆</m:t>
+                        </m:r>
+                      </m:sub>
+                    </m:sSub>
+                    <m:r>
+                      <a:rPr lang="fr-FR" b="0" i="1" smtClean="0">
+                        <a:latin typeface="Cambria Math" panose="02040503050406030204" pitchFamily="18" charset="0"/>
+                      </a:rPr>
+                      <m:t>=8+4</m:t>
+                    </m:r>
+                  </m:oMath>
+                </a14:m>
+                <a:endParaRPr lang="fr-FR" b="0" dirty="0"/>
+              </a:p>
+              <a:p>
+                <a14:m>
+                  <m:oMath xmlns:m="http://schemas.openxmlformats.org/officeDocument/2006/math">
+                    <m:sSub>
+                      <m:sSubPr>
+                        <m:ctrlPr>
+                          <a:rPr lang="fr-FR" b="0" i="1" smtClean="0">
+                            <a:latin typeface="Cambria Math" panose="02040503050406030204" pitchFamily="18" charset="0"/>
+                          </a:rPr>
+                        </m:ctrlPr>
+                      </m:sSubPr>
+                      <m:e>
+                        <m:r>
+                          <a:rPr lang="fr-FR" b="0" i="1" smtClean="0">
+                            <a:latin typeface="Cambria Math" panose="02040503050406030204" pitchFamily="18" charset="0"/>
+                          </a:rPr>
+                          <m:t>𝐸</m:t>
+                        </m:r>
+                      </m:e>
+                      <m:sub>
+                        <m:r>
+                          <a:rPr lang="fr-FR" b="0" i="1" smtClean="0">
+                            <a:latin typeface="Cambria Math" panose="02040503050406030204" pitchFamily="18" charset="0"/>
+                          </a:rPr>
+                          <m:t>𝑆</m:t>
+                        </m:r>
+                      </m:sub>
+                    </m:sSub>
+                    <m:r>
+                      <a:rPr lang="fr-FR" b="0" i="1" smtClean="0">
+                        <a:latin typeface="Cambria Math" panose="02040503050406030204" pitchFamily="18" charset="0"/>
+                      </a:rPr>
+                      <m:t>=18</m:t>
+                    </m:r>
+                  </m:oMath>
+                </a14:m>
+                <a:endParaRPr lang="fr-FR" b="0" dirty="0"/>
+              </a:p>
+              <a:p>
+                <a14:m>
+                  <m:oMath xmlns:m="http://schemas.openxmlformats.org/officeDocument/2006/math">
+                    <m:r>
+                      <a:rPr lang="fr-FR" b="0" i="1" smtClean="0">
+                        <a:latin typeface="Cambria Math" panose="02040503050406030204" pitchFamily="18" charset="0"/>
+                      </a:rPr>
+                      <m:t>h</m:t>
+                    </m:r>
+                    <m:r>
+                      <a:rPr lang="fr-FR" b="0" i="1" smtClean="0">
+                        <a:latin typeface="Cambria Math" panose="02040503050406030204" pitchFamily="18" charset="0"/>
+                      </a:rPr>
+                      <m:t>=</m:t>
+                    </m:r>
+                    <m:r>
+                      <a:rPr lang="fr-FR" b="0" i="1" smtClean="0">
+                        <a:latin typeface="Cambria Math" panose="02040503050406030204" pitchFamily="18" charset="0"/>
+                      </a:rPr>
+                      <m:t>𝑚</m:t>
+                    </m:r>
+                    <m:r>
+                      <a:rPr lang="fr-FR" b="0" i="1" smtClean="0">
+                        <a:latin typeface="Cambria Math" panose="02040503050406030204" pitchFamily="18" charset="0"/>
+                      </a:rPr>
+                      <m:t>−</m:t>
+                    </m:r>
+                    <m:sSub>
+                      <m:sSubPr>
+                        <m:ctrlPr>
+                          <a:rPr lang="fr-FR" b="0" i="1" smtClean="0">
+                            <a:latin typeface="Cambria Math" panose="02040503050406030204" pitchFamily="18" charset="0"/>
+                          </a:rPr>
+                        </m:ctrlPr>
+                      </m:sSubPr>
+                      <m:e>
+                        <m:r>
+                          <a:rPr lang="fr-FR" b="0" i="1" smtClean="0">
+                            <a:latin typeface="Cambria Math" panose="02040503050406030204" pitchFamily="18" charset="0"/>
+                          </a:rPr>
+                          <m:t>𝐸</m:t>
+                        </m:r>
+                      </m:e>
+                      <m:sub>
+                        <m:r>
+                          <a:rPr lang="fr-FR" b="0" i="1" smtClean="0">
+                            <a:latin typeface="Cambria Math" panose="02040503050406030204" pitchFamily="18" charset="0"/>
+                          </a:rPr>
+                          <m:t>𝑆</m:t>
+                        </m:r>
+                      </m:sub>
+                    </m:sSub>
+                    <m:r>
+                      <a:rPr lang="fr-FR" b="0" i="1" smtClean="0">
+                        <a:latin typeface="Cambria Math" panose="02040503050406030204" pitchFamily="18" charset="0"/>
+                      </a:rPr>
+                      <m:t>+</m:t>
+                    </m:r>
+                    <m:sSub>
+                      <m:sSubPr>
+                        <m:ctrlPr>
+                          <a:rPr lang="fr-FR" b="0" i="1" smtClean="0">
+                            <a:latin typeface="Cambria Math" panose="02040503050406030204" pitchFamily="18" charset="0"/>
+                          </a:rPr>
+                        </m:ctrlPr>
+                      </m:sSubPr>
+                      <m:e>
+                        <m:r>
+                          <a:rPr lang="fr-FR" b="0" i="1" smtClean="0">
+                            <a:latin typeface="Cambria Math" panose="02040503050406030204" pitchFamily="18" charset="0"/>
+                          </a:rPr>
+                          <m:t>𝐼</m:t>
+                        </m:r>
+                      </m:e>
+                      <m:sub>
+                        <m:r>
+                          <a:rPr lang="fr-FR" b="0" i="1" smtClean="0">
+                            <a:latin typeface="Cambria Math" panose="02040503050406030204" pitchFamily="18" charset="0"/>
+                          </a:rPr>
+                          <m:t>𝑆</m:t>
+                        </m:r>
+                      </m:sub>
+                    </m:sSub>
+                  </m:oMath>
+                </a14:m>
+                <a:endParaRPr lang="fr-FR" b="0" i="1" dirty="0">
+                  <a:latin typeface="Cambria Math" panose="02040503050406030204" pitchFamily="18" charset="0"/>
+                </a:endParaRPr>
+              </a:p>
+              <a:p>
+                <a14:m>
+                  <m:oMath xmlns:m="http://schemas.openxmlformats.org/officeDocument/2006/math">
+                    <m:r>
+                      <a:rPr lang="fr-FR" b="0" i="1" smtClean="0">
+                        <a:latin typeface="Cambria Math" panose="02040503050406030204" pitchFamily="18" charset="0"/>
+                      </a:rPr>
+                      <m:t>h</m:t>
+                    </m:r>
+                    <m:r>
+                      <a:rPr lang="fr-FR" b="0" i="1" smtClean="0">
+                        <a:latin typeface="Cambria Math" panose="02040503050406030204" pitchFamily="18" charset="0"/>
+                      </a:rPr>
+                      <m:t>=1−12+16=5</m:t>
+                    </m:r>
+                  </m:oMath>
+                </a14:m>
+                <a:endParaRPr lang="fr-FR" b="0" dirty="0"/>
+              </a:p>
+            </p:txBody>
+          </p:sp>
+        </mc:Choice>
+        <mc:Fallback>
+          <p:sp>
+            <p:nvSpPr>
+              <p:cNvPr id="126" name="Espace réservé du contenu 2">
+                <a:extLst>
+                  <a:ext uri="{FF2B5EF4-FFF2-40B4-BE49-F238E27FC236}">
+                    <a16:creationId xmlns:a16="http://schemas.microsoft.com/office/drawing/2014/main" id="{E093C812-7200-6E73-1731-EB2B34757C0D}"/>
+                  </a:ext>
+                </a:extLst>
+              </p:cNvPr>
+              <p:cNvSpPr>
+                <a:spLocks noGrp="1" noRot="1" noChangeAspect="1" noMove="1" noResize="1" noEditPoints="1" noAdjustHandles="1" noChangeArrowheads="1" noChangeShapeType="1" noTextEdit="1"/>
+              </p:cNvSpPr>
+              <p:nvPr>
+                <p:ph idx="1"/>
+              </p:nvPr>
+            </p:nvSpPr>
+            <p:spPr>
+              <a:xfrm>
+                <a:off x="117795" y="2801082"/>
+                <a:ext cx="6228187" cy="3434144"/>
+              </a:xfrm>
+              <a:blipFill>
+                <a:blip r:embed="rId7"/>
+                <a:stretch>
+                  <a:fillRect/>
+                </a:stretch>
+              </a:blipFill>
+            </p:spPr>
+            <p:txBody>
+              <a:bodyPr/>
+              <a:lstStyle/>
+              <a:p>
+                <a:r>
+                  <a:rPr lang="fr-FR">
+                    <a:noFill/>
+                  </a:rPr>
+                  <a:t> </a:t>
+                </a:r>
+              </a:p>
+            </p:txBody>
+          </p:sp>
+        </mc:Fallback>
+      </mc:AlternateContent>
+    </p:spTree>
+    <p:extLst>
+      <p:ext uri="{BB962C8B-B14F-4D97-AF65-F5344CB8AC3E}">
+        <p14:creationId xmlns:p14="http://schemas.microsoft.com/office/powerpoint/2010/main" val="3351961178"/>
+      </p:ext>
+    </p:extLst>
+  </p:cSld>
+  <p:clrMapOvr>
+    <a:masterClrMapping/>
+  </p:clrMapOvr>
+</p:sld>
+</file>
+
+<file path=ppt/slides/slide16.xml><?xml version="1.0" encoding="utf-8"?>
+<p:sld xmlns:a="http://schemas.openxmlformats.org/drawingml/2006/main" xmlns:r="http://schemas.openxmlformats.org/officeDocument/2006/relationships" xmlns:p="http://schemas.openxmlformats.org/presentationml/2006/main">
+  <p:cSld>
+    <p:spTree>
+      <p:nvGrpSpPr>
+        <p:cNvPr id="1" name=""/>
+        <p:cNvGrpSpPr/>
+        <p:nvPr/>
+      </p:nvGrpSpPr>
+      <p:grpSpPr>
+        <a:xfrm>
+          <a:off x="0" y="0"/>
+          <a:ext cx="0" cy="0"/>
+          <a:chOff x="0" y="0"/>
+          <a:chExt cx="0" cy="0"/>
+        </a:xfrm>
+      </p:grpSpPr>
+      <p:sp>
+        <p:nvSpPr>
+          <p:cNvPr id="2" name="Titre 1">
+            <a:extLst>
+              <a:ext uri="{FF2B5EF4-FFF2-40B4-BE49-F238E27FC236}">
+                <a16:creationId xmlns:a16="http://schemas.microsoft.com/office/drawing/2014/main" id="{E92C1190-8267-8316-1B4D-BCDE0004A4B0}"/>
+              </a:ext>
+            </a:extLst>
+          </p:cNvPr>
+          <p:cNvSpPr>
+            <a:spLocks noGrp="1"/>
+          </p:cNvSpPr>
+          <p:nvPr>
+            <p:ph type="title"/>
+          </p:nvPr>
+        </p:nvSpPr>
+        <p:spPr/>
+        <p:txBody>
+          <a:bodyPr/>
+          <a:lstStyle/>
+          <a:p>
+            <a:endParaRPr lang="fr-FR"/>
+          </a:p>
+        </p:txBody>
+      </p:sp>
+      <p:sp>
+        <p:nvSpPr>
+          <p:cNvPr id="3" name="Espace réservé du contenu 2">
+            <a:extLst>
+              <a:ext uri="{FF2B5EF4-FFF2-40B4-BE49-F238E27FC236}">
+                <a16:creationId xmlns:a16="http://schemas.microsoft.com/office/drawing/2014/main" id="{897B57A5-C57B-746C-98D3-48809D771AAC}"/>
+              </a:ext>
+            </a:extLst>
+          </p:cNvPr>
+          <p:cNvSpPr>
+            <a:spLocks noGrp="1"/>
+          </p:cNvSpPr>
+          <p:nvPr>
+            <p:ph idx="1"/>
+          </p:nvPr>
+        </p:nvSpPr>
+        <p:spPr/>
+        <p:txBody>
+          <a:bodyPr/>
+          <a:lstStyle/>
+          <a:p>
+            <a:endParaRPr lang="fr-FR"/>
+          </a:p>
+        </p:txBody>
+      </p:sp>
+    </p:spTree>
+    <p:extLst>
+      <p:ext uri="{BB962C8B-B14F-4D97-AF65-F5344CB8AC3E}">
+        <p14:creationId xmlns:p14="http://schemas.microsoft.com/office/powerpoint/2010/main" val="3699803483"/>
+      </p:ext>
+    </p:extLst>
+  </p:cSld>
+  <p:clrMapOvr>
+    <a:masterClrMapping/>
+  </p:clrMapOvr>
+</p:sld>
+</file>
+
+<file path=ppt/slides/slide17.xml><?xml version="1.0" encoding="utf-8"?>
+<p:sld xmlns:a="http://schemas.openxmlformats.org/drawingml/2006/main" xmlns:r="http://schemas.openxmlformats.org/officeDocument/2006/relationships" xmlns:p="http://schemas.openxmlformats.org/presentationml/2006/main">
+  <p:cSld>
+    <p:spTree>
+      <p:nvGrpSpPr>
         <p:cNvPr id="1" name=""/>
         <p:cNvGrpSpPr/>
         <p:nvPr/>
@@ -16135,7 +20831,7 @@
 </p:sld>
 </file>
 
-<file path=ppt/slides/slide15.xml><?xml version="1.0" encoding="utf-8"?>
+<file path=ppt/slides/slide18.xml><?xml version="1.0" encoding="utf-8"?>
 <p:sld xmlns:a="http://schemas.openxmlformats.org/drawingml/2006/main" xmlns:r="http://schemas.openxmlformats.org/officeDocument/2006/relationships" xmlns:p="http://schemas.openxmlformats.org/presentationml/2006/main">
   <p:cSld>
     <p:spTree>
@@ -17505,7 +22201,7 @@
 </p:sld>
 </file>
 
-<file path=ppt/slides/slide16.xml><?xml version="1.0" encoding="utf-8"?>
+<file path=ppt/slides/slide19.xml><?xml version="1.0" encoding="utf-8"?>
 <p:sld xmlns:a="http://schemas.openxmlformats.org/drawingml/2006/main" xmlns:r="http://schemas.openxmlformats.org/officeDocument/2006/relationships" xmlns:p="http://schemas.openxmlformats.org/presentationml/2006/main">
   <p:cSld>
     <p:spTree>
@@ -24844,8 +29540,8 @@
           </a:p>
         </p:txBody>
       </p:sp>
-      <mc:AlternateContent xmlns:mc="http://schemas.openxmlformats.org/markup-compatibility/2006">
-        <mc:Choice xmlns:a14="http://schemas.microsoft.com/office/drawing/2010/main" Requires="a14">
+      <mc:AlternateContent xmlns:mc="http://schemas.openxmlformats.org/markup-compatibility/2006" xmlns:a14="http://schemas.microsoft.com/office/drawing/2010/main">
+        <mc:Choice Requires="a14">
           <p:sp>
             <p:nvSpPr>
               <p:cNvPr id="3" name="Espace réservé du contenu 2">
@@ -25638,17 +30334,7 @@
                                     <a:latin typeface="Cambria Math" panose="02040503050406030204" pitchFamily="18" charset="0"/>
                                     <a:ea typeface="Cambria Math" panose="02040503050406030204" pitchFamily="18" charset="0"/>
                                   </a:rPr>
-                                  <m:t>s</m:t>
-                                </m:r>
-                                <m:r>
-                                  <m:rPr>
-                                    <m:sty m:val="p"/>
-                                  </m:rPr>
-                                  <a:rPr lang="fr-FR">
-                                    <a:latin typeface="Cambria Math" panose="02040503050406030204" pitchFamily="18" charset="0"/>
-                                    <a:ea typeface="Cambria Math" panose="02040503050406030204" pitchFamily="18" charset="0"/>
-                                  </a:rPr>
-                                  <m:t>in</m:t>
+                                  <m:t>sin</m:t>
                                 </m:r>
                               </m:fName>
                               <m:e>
@@ -26014,17 +30700,7 @@
                                     <a:latin typeface="Cambria Math" panose="02040503050406030204" pitchFamily="18" charset="0"/>
                                     <a:ea typeface="Cambria Math" panose="02040503050406030204" pitchFamily="18" charset="0"/>
                                   </a:rPr>
-                                  <m:t>s</m:t>
-                                </m:r>
-                                <m:r>
-                                  <m:rPr>
-                                    <m:sty m:val="p"/>
-                                  </m:rPr>
-                                  <a:rPr lang="fr-FR">
-                                    <a:latin typeface="Cambria Math" panose="02040503050406030204" pitchFamily="18" charset="0"/>
-                                    <a:ea typeface="Cambria Math" panose="02040503050406030204" pitchFamily="18" charset="0"/>
-                                  </a:rPr>
-                                  <m:t>in</m:t>
+                                  <m:t>sin</m:t>
                                 </m:r>
                               </m:fName>
                               <m:e>
@@ -27250,7 +31926,7 @@
             </p:txBody>
           </p:sp>
         </mc:Choice>
-        <mc:Fallback>
+        <mc:Fallback xmlns="">
           <p:sp>
             <p:nvSpPr>
               <p:cNvPr id="3" name="Espace réservé du contenu 2">
@@ -27379,8 +32055,8 @@
           </a:p>
         </p:txBody>
       </p:sp>
-      <mc:AlternateContent xmlns:mc="http://schemas.openxmlformats.org/markup-compatibility/2006">
-        <mc:Choice xmlns:a14="http://schemas.microsoft.com/office/drawing/2010/main" Requires="a14">
+      <mc:AlternateContent xmlns:mc="http://schemas.openxmlformats.org/markup-compatibility/2006" xmlns:a14="http://schemas.microsoft.com/office/drawing/2010/main">
+        <mc:Choice Requires="a14">
           <p:sp>
             <p:nvSpPr>
               <p:cNvPr id="3" name="Espace réservé du contenu 2">
@@ -27621,7 +32297,7 @@
                     <m:d>
                       <m:dPr>
                         <m:ctrlPr>
-                          <a:rPr lang="fr-FR" b="0" i="0" smtClean="0">
+                          <a:rPr lang="fr-FR" b="0" i="1" smtClean="0">
                             <a:latin typeface="Cambria Math" panose="02040503050406030204" pitchFamily="18" charset="0"/>
                           </a:rPr>
                         </m:ctrlPr>
@@ -27898,7 +32574,7 @@
             </p:txBody>
           </p:sp>
         </mc:Choice>
-        <mc:Fallback>
+        <mc:Fallback xmlns="">
           <p:sp>
             <p:nvSpPr>
               <p:cNvPr id="3" name="Espace réservé du contenu 2">
